--- a/10-Knowledge-Products/KP1-GEA/videos/module_5/en/decks/KP1_M5_5.1_Deck_v0.1.pptx
+++ b/10-Knowledge-Products/KP1-GEA/videos/module_5/en/decks/KP1_M5_5.1_Deck_v0.1.pptx
@@ -1155,13 +1155,13 @@
           <a:lstStyle/>
           <a:p>
             <a:r>
-              <a:t>VO: Second, the shape of a good prompt. Every play in this topic uses the same four parts. One — name the input you are pasting: below is my Discovery brief. Two — break the task into named outputs: score the capabilities, list the gaps, rank them. Three — state the exact output format you want: a four-row table plus three bullets. Four — add a safeguard line that names this prompt's specific risk. A prompt with these four parts gives you a usable artefact. A vague one — help me with my architecture — gives you vague mush.</a:t>
+              <a:t>VO: Second, the shape of a good prompt. Every play in this module uses the same four parts. One — name the input you are pasting: below is my Discovery brief. Two — break the task into named outputs: score the capabilities, list the gaps, rank them. Three — state the exact output format you want: a four-row table plus three bullets. Four — add a safeguard line that names this prompt's specific risk. A prompt with these four parts gives you a usable artefact. A vague one — help me with my architecture — gives you vague mush.</a:t>
             </a:r>
           </a:p>
           <a:p/>
           <a:p>
             <a:r>
-              <a:t>Production cue: the centrepiece slide of the module. Reveal the four rows one at a time and hold the finished slide a beat longer — every later video refers back to it.</a:t>
+              <a:t>Production cue: the centrepiece slide of the module. The four parts are shown as one prompt block on the right, bracketed part by part. Reveal the four parts one at a time and hold the finished slide a beat longer — every later video refers back to it.</a:t>
             </a:r>
           </a:p>
         </p:txBody>
@@ -1383,7 +1383,7 @@
           <a:lstStyle/>
           <a:p>
             <a:r>
-              <a:t>VO: So these are the ground rules. AI is a drafting partner, not an oracle. Use the four-part prompt. Make the safeguard specific. And keep the decision yours. Hold to these, and the plays in this topic save you days without leading you astray. Forget them, and AI becomes a fast way to be confidently wrong.</a:t>
+              <a:t>VO: So these are the ground rules. AI is a drafting partner, not an oracle. Use the four-part prompt. Make the safeguard specific. And keep the decision yours. Hold to these, and the plays in this module save you days without leading you astray. Forget them, and AI becomes a fast way to be confidently wrong.</a:t>
             </a:r>
           </a:p>
         </p:txBody>
@@ -12631,7 +12631,7 @@
         <p:spPr>
           <a:xfrm>
             <a:off x="658368" y="1600200"/>
-            <a:ext cx="10881360" cy="2651760"/>
+            <a:ext cx="10881360" cy="1673352"/>
           </a:xfrm>
           <a:prstGeom prst="rect">
             <a:avLst/>
@@ -12685,7 +12685,7 @@
         </p:nvSpPr>
         <p:spPr>
           <a:xfrm>
-            <a:off x="658368" y="4434840"/>
+            <a:off x="658368" y="3456432"/>
             <a:ext cx="10881360" cy="1325880"/>
           </a:xfrm>
           <a:prstGeom prst="roundRect">
@@ -12731,7 +12731,7 @@
         </p:nvSpPr>
         <p:spPr>
           <a:xfrm>
-            <a:off x="859536" y="4626864"/>
+            <a:off x="859536" y="3648456"/>
             <a:ext cx="10479024" cy="1051560"/>
           </a:xfrm>
           <a:prstGeom prst="rect">
@@ -12894,20 +12894,22 @@
       </p:sp>
       <p:sp>
         <p:nvSpPr>
-          <p:cNvPr id="4" name="Oval 3"/>
+          <p:cNvPr id="4" name="Rounded Rectangle 3"/>
           <p:cNvSpPr/>
           <p:nvPr/>
         </p:nvSpPr>
         <p:spPr>
           <a:xfrm>
-            <a:off x="621792" y="1508760"/>
-            <a:ext cx="310896" cy="310896"/>
-          </a:xfrm>
-          <a:prstGeom prst="ellipse">
-            <a:avLst/>
+            <a:off x="5989320" y="1508760"/>
+            <a:ext cx="5550408" cy="4114800"/>
+          </a:xfrm>
+          <a:prstGeom prst="roundRect">
+            <a:avLst>
+              <a:gd name="adj" fmla="val 3000"/>
+            </a:avLst>
           </a:prstGeom>
           <a:solidFill>
-            <a:srgbClr val="009CD6"/>
+            <a:srgbClr val="F2F2F2"/>
           </a:solidFill>
           <a:ln>
             <a:noFill/>
@@ -12929,19 +12931,10 @@
           </a:fontRef>
         </p:style>
         <p:txBody>
-          <a:bodyPr rtlCol="0" anchor="ctr" lIns="0" rIns="0" tIns="0" bIns="0" wrap="square"/>
+          <a:bodyPr rtlCol="0" anchor="ctr"/>
           <a:lstStyle/>
           <a:p>
             <a:pPr algn="ctr"/>
-            <a:r>
-              <a:rPr sz="1300" b="1" i="0">
-                <a:solidFill>
-                  <a:srgbClr val="FFFFFF"/>
-                </a:solidFill>
-                <a:latin typeface="Arial"/>
-              </a:rPr>
-              <a:t>1</a:t>
-            </a:r>
           </a:p>
         </p:txBody>
       </p:sp>
@@ -12953,8 +12946,8 @@
         </p:nvSpPr>
         <p:spPr>
           <a:xfrm>
-            <a:off x="1115568" y="1463040"/>
-            <a:ext cx="10527487" cy="1028699"/>
+            <a:off x="6217920" y="1618488"/>
+            <a:ext cx="5093208" cy="320040"/>
           </a:xfrm>
           <a:prstGeom prst="rect">
             <a:avLst/>
@@ -12967,55 +12960,34 @@
           </a:bodyPr>
           <a:lstStyle/>
           <a:p>
-            <a:pPr>
-              <a:spcAft>
-                <a:spcPts val="300"/>
-              </a:spcAft>
-            </a:pPr>
-            <a:r>
-              <a:rPr sz="1900" b="1" i="0">
-                <a:solidFill>
-                  <a:srgbClr val="1A1A1A"/>
-                </a:solidFill>
-                <a:latin typeface="Arial"/>
-              </a:rPr>
-              <a:t>Name the input you are pasting.</a:t>
-            </a:r>
-          </a:p>
-          <a:p>
-            <a:pPr>
-              <a:spcAft>
-                <a:spcPts val="300"/>
-              </a:spcAft>
-            </a:pPr>
-            <a:r>
-              <a:rPr sz="1550" b="0" i="0">
+            <a:r>
+              <a:rPr sz="1050" b="1" i="0">
                 <a:solidFill>
                   <a:srgbClr val="595959"/>
                 </a:solidFill>
                 <a:latin typeface="Arial"/>
               </a:rPr>
-              <a:t>"Below is my Discovery brief for the education sector."</a:t>
-            </a:r>
-          </a:p>
-        </p:txBody>
-      </p:sp>
-      <p:sp>
-        <p:nvSpPr>
-          <p:cNvPr id="6" name="Rectangle 5"/>
+              <a:t>THE PROMPT, AS PASTED</a:t>
+            </a:r>
+          </a:p>
+        </p:txBody>
+      </p:sp>
+      <p:sp>
+        <p:nvSpPr>
+          <p:cNvPr id="6" name="Oval 5"/>
           <p:cNvSpPr/>
           <p:nvPr/>
         </p:nvSpPr>
         <p:spPr>
           <a:xfrm>
-            <a:off x="621792" y="2496312"/>
-            <a:ext cx="10881360" cy="12700"/>
-          </a:xfrm>
-          <a:prstGeom prst="rect">
+            <a:off x="658368" y="2084832"/>
+            <a:ext cx="310896" cy="310896"/>
+          </a:xfrm>
+          <a:prstGeom prst="ellipse">
             <a:avLst/>
           </a:prstGeom>
           <a:solidFill>
-            <a:srgbClr val="DDECF4"/>
+            <a:srgbClr val="009CD6"/>
           </a:solidFill>
           <a:ln>
             <a:noFill/>
@@ -13037,25 +13009,68 @@
           </a:fontRef>
         </p:style>
         <p:txBody>
-          <a:bodyPr rtlCol="0" anchor="ctr"/>
+          <a:bodyPr rtlCol="0" anchor="ctr" lIns="0" rIns="0" tIns="0" bIns="0" wrap="square"/>
           <a:lstStyle/>
           <a:p>
             <a:pPr algn="ctr"/>
-          </a:p>
-        </p:txBody>
-      </p:sp>
-      <p:sp>
-        <p:nvSpPr>
-          <p:cNvPr id="7" name="Oval 6"/>
+            <a:r>
+              <a:rPr sz="1300" b="1" i="0">
+                <a:solidFill>
+                  <a:srgbClr val="FFFFFF"/>
+                </a:solidFill>
+                <a:latin typeface="Arial"/>
+              </a:rPr>
+              <a:t>1</a:t>
+            </a:r>
+          </a:p>
+        </p:txBody>
+      </p:sp>
+      <p:sp>
+        <p:nvSpPr>
+          <p:cNvPr id="7" name="TextBox 6"/>
+          <p:cNvSpPr txBox="1"/>
+          <p:nvPr/>
+        </p:nvSpPr>
+        <p:spPr>
+          <a:xfrm>
+            <a:off x="1115568" y="2011680"/>
+            <a:ext cx="4480560" cy="811530"/>
+          </a:xfrm>
+          <a:prstGeom prst="rect">
+            <a:avLst/>
+          </a:prstGeom>
+          <a:noFill/>
+        </p:spPr>
+        <p:txBody>
+          <a:bodyPr wrap="square">
+            <a:spAutoFit/>
+          </a:bodyPr>
+          <a:lstStyle/>
+          <a:p>
+            <a:r>
+              <a:rPr sz="1600" b="1" i="0">
+                <a:solidFill>
+                  <a:srgbClr val="1A1A1A"/>
+                </a:solidFill>
+                <a:latin typeface="Arial"/>
+              </a:rPr>
+              <a:t>Name the input you are pasting.</a:t>
+            </a:r>
+          </a:p>
+        </p:txBody>
+      </p:sp>
+      <p:sp>
+        <p:nvSpPr>
+          <p:cNvPr id="8" name="Rectangle 7"/>
           <p:cNvSpPr/>
           <p:nvPr/>
         </p:nvSpPr>
         <p:spPr>
           <a:xfrm>
-            <a:off x="621792" y="2583179"/>
-            <a:ext cx="310896" cy="310896"/>
-          </a:xfrm>
-          <a:prstGeom prst="ellipse">
+            <a:off x="6099048" y="2103120"/>
+            <a:ext cx="54864" cy="674370"/>
+          </a:xfrm>
+          <a:prstGeom prst="rect">
             <a:avLst/>
           </a:prstGeom>
           <a:solidFill>
@@ -13081,74 +13096,10 @@
           </a:fontRef>
         </p:style>
         <p:txBody>
-          <a:bodyPr rtlCol="0" anchor="ctr" lIns="0" rIns="0" tIns="0" bIns="0" wrap="square"/>
+          <a:bodyPr rtlCol="0" anchor="ctr"/>
           <a:lstStyle/>
           <a:p>
             <a:pPr algn="ctr"/>
-            <a:r>
-              <a:rPr sz="1300" b="1" i="0">
-                <a:solidFill>
-                  <a:srgbClr val="FFFFFF"/>
-                </a:solidFill>
-                <a:latin typeface="Arial"/>
-              </a:rPr>
-              <a:t>2</a:t>
-            </a:r>
-          </a:p>
-        </p:txBody>
-      </p:sp>
-      <p:sp>
-        <p:nvSpPr>
-          <p:cNvPr id="8" name="TextBox 7"/>
-          <p:cNvSpPr txBox="1"/>
-          <p:nvPr/>
-        </p:nvSpPr>
-        <p:spPr>
-          <a:xfrm>
-            <a:off x="1115568" y="2537460"/>
-            <a:ext cx="10527487" cy="1028699"/>
-          </a:xfrm>
-          <a:prstGeom prst="rect">
-            <a:avLst/>
-          </a:prstGeom>
-          <a:noFill/>
-        </p:spPr>
-        <p:txBody>
-          <a:bodyPr wrap="square">
-            <a:spAutoFit/>
-          </a:bodyPr>
-          <a:lstStyle/>
-          <a:p>
-            <a:pPr>
-              <a:spcAft>
-                <a:spcPts val="300"/>
-              </a:spcAft>
-            </a:pPr>
-            <a:r>
-              <a:rPr sz="1900" b="1" i="0">
-                <a:solidFill>
-                  <a:srgbClr val="1A1A1A"/>
-                </a:solidFill>
-                <a:latin typeface="Arial"/>
-              </a:rPr>
-              <a:t>Break the task into named outputs.</a:t>
-            </a:r>
-          </a:p>
-          <a:p>
-            <a:pPr>
-              <a:spcAft>
-                <a:spcPts val="300"/>
-              </a:spcAft>
-            </a:pPr>
-            <a:r>
-              <a:rPr sz="1550" b="0" i="0">
-                <a:solidFill>
-                  <a:srgbClr val="595959"/>
-                </a:solidFill>
-                <a:latin typeface="Arial"/>
-              </a:rPr>
-              <a:t>"Score the capabilities, list the gaps, rank them."</a:t>
-            </a:r>
           </a:p>
         </p:txBody>
       </p:sp>
@@ -13160,14 +13111,14 @@
         </p:nvSpPr>
         <p:spPr>
           <a:xfrm>
-            <a:off x="621792" y="3570732"/>
-            <a:ext cx="10881360" cy="12700"/>
+            <a:off x="5669280" y="2231136"/>
+            <a:ext cx="274320" cy="19050"/>
           </a:xfrm>
           <a:prstGeom prst="rect">
             <a:avLst/>
           </a:prstGeom>
           <a:solidFill>
-            <a:srgbClr val="DDECF4"/>
+            <a:srgbClr val="009CD6"/>
           </a:solidFill>
           <a:ln>
             <a:noFill/>
@@ -13198,20 +13149,54 @@
       </p:sp>
       <p:sp>
         <p:nvSpPr>
-          <p:cNvPr id="10" name="Oval 9"/>
+          <p:cNvPr id="10" name="TextBox 9"/>
+          <p:cNvSpPr txBox="1"/>
+          <p:nvPr/>
+        </p:nvSpPr>
+        <p:spPr>
+          <a:xfrm>
+            <a:off x="6281928" y="2029968"/>
+            <a:ext cx="5047488" cy="811530"/>
+          </a:xfrm>
+          <a:prstGeom prst="rect">
+            <a:avLst/>
+          </a:prstGeom>
+          <a:noFill/>
+        </p:spPr>
+        <p:txBody>
+          <a:bodyPr wrap="square">
+            <a:spAutoFit/>
+          </a:bodyPr>
+          <a:lstStyle/>
+          <a:p>
+            <a:r>
+              <a:rPr sz="1500" b="0" i="1">
+                <a:solidFill>
+                  <a:srgbClr val="1A1A1A"/>
+                </a:solidFill>
+                <a:latin typeface="Arial"/>
+              </a:rPr>
+              <a:t>"Below is my Discovery brief for the education sector."</a:t>
+            </a:r>
+          </a:p>
+        </p:txBody>
+      </p:sp>
+      <p:sp>
+        <p:nvSpPr>
+          <p:cNvPr id="11" name="Rectangle 10"/>
           <p:cNvSpPr/>
           <p:nvPr/>
         </p:nvSpPr>
         <p:spPr>
           <a:xfrm>
-            <a:off x="621792" y="3657599"/>
-            <a:ext cx="310896" cy="310896"/>
-          </a:xfrm>
-          <a:prstGeom prst="ellipse">
+            <a:off x="658368" y="2868930"/>
+            <a:ext cx="4937760" cy="12700"/>
+          </a:xfrm>
+          <a:prstGeom prst="rect">
             <a:avLst/>
           </a:prstGeom>
           <a:solidFill>
-            <a:srgbClr val="009CD6"/>
+            <a:srgbClr val="DDECF4"/>
           </a:solidFill>
           <a:ln>
             <a:noFill/>
@@ -13233,93 +13218,29 @@
           </a:fontRef>
         </p:style>
         <p:txBody>
-          <a:bodyPr rtlCol="0" anchor="ctr" lIns="0" rIns="0" tIns="0" bIns="0" wrap="square"/>
+          <a:bodyPr rtlCol="0" anchor="ctr"/>
           <a:lstStyle/>
           <a:p>
             <a:pPr algn="ctr"/>
-            <a:r>
-              <a:rPr sz="1300" b="1" i="0">
-                <a:solidFill>
-                  <a:srgbClr val="FFFFFF"/>
-                </a:solidFill>
-                <a:latin typeface="Arial"/>
-              </a:rPr>
-              <a:t>3</a:t>
-            </a:r>
-          </a:p>
-        </p:txBody>
-      </p:sp>
-      <p:sp>
-        <p:nvSpPr>
-          <p:cNvPr id="11" name="TextBox 10"/>
-          <p:cNvSpPr txBox="1"/>
-          <p:nvPr/>
-        </p:nvSpPr>
-        <p:spPr>
-          <a:xfrm>
-            <a:off x="1115568" y="3611879"/>
-            <a:ext cx="10527487" cy="1028699"/>
-          </a:xfrm>
-          <a:prstGeom prst="rect">
-            <a:avLst/>
-          </a:prstGeom>
-          <a:noFill/>
-        </p:spPr>
-        <p:txBody>
-          <a:bodyPr wrap="square">
-            <a:spAutoFit/>
-          </a:bodyPr>
-          <a:lstStyle/>
-          <a:p>
-            <a:pPr>
-              <a:spcAft>
-                <a:spcPts val="300"/>
-              </a:spcAft>
-            </a:pPr>
-            <a:r>
-              <a:rPr sz="1900" b="1" i="0">
-                <a:solidFill>
-                  <a:srgbClr val="1A1A1A"/>
-                </a:solidFill>
-                <a:latin typeface="Arial"/>
-              </a:rPr>
-              <a:t>State the exact output format you want.</a:t>
-            </a:r>
-          </a:p>
-          <a:p>
-            <a:pPr>
-              <a:spcAft>
-                <a:spcPts val="300"/>
-              </a:spcAft>
-            </a:pPr>
-            <a:r>
-              <a:rPr sz="1550" b="0" i="0">
-                <a:solidFill>
-                  <a:srgbClr val="595959"/>
-                </a:solidFill>
-                <a:latin typeface="Arial"/>
-              </a:rPr>
-              <a:t>"A four-row table plus three bullets."</a:t>
-            </a:r>
-          </a:p>
-        </p:txBody>
-      </p:sp>
-      <p:sp>
-        <p:nvSpPr>
-          <p:cNvPr id="12" name="Rectangle 11"/>
+          </a:p>
+        </p:txBody>
+      </p:sp>
+      <p:sp>
+        <p:nvSpPr>
+          <p:cNvPr id="12" name="Oval 11"/>
           <p:cNvSpPr/>
           <p:nvPr/>
         </p:nvSpPr>
         <p:spPr>
           <a:xfrm>
-            <a:off x="621792" y="4645152"/>
-            <a:ext cx="10881360" cy="12700"/>
-          </a:xfrm>
-          <a:prstGeom prst="rect">
+            <a:off x="658368" y="2987802"/>
+            <a:ext cx="310896" cy="310896"/>
+          </a:xfrm>
+          <a:prstGeom prst="ellipse">
             <a:avLst/>
           </a:prstGeom>
           <a:solidFill>
-            <a:srgbClr val="DDECF4"/>
+            <a:srgbClr val="009CD6"/>
           </a:solidFill>
           <a:ln>
             <a:noFill/>
@@ -13341,25 +13262,68 @@
           </a:fontRef>
         </p:style>
         <p:txBody>
-          <a:bodyPr rtlCol="0" anchor="ctr"/>
+          <a:bodyPr rtlCol="0" anchor="ctr" lIns="0" rIns="0" tIns="0" bIns="0" wrap="square"/>
           <a:lstStyle/>
           <a:p>
             <a:pPr algn="ctr"/>
-          </a:p>
-        </p:txBody>
-      </p:sp>
-      <p:sp>
-        <p:nvSpPr>
-          <p:cNvPr id="13" name="Oval 12"/>
+            <a:r>
+              <a:rPr sz="1300" b="1" i="0">
+                <a:solidFill>
+                  <a:srgbClr val="FFFFFF"/>
+                </a:solidFill>
+                <a:latin typeface="Arial"/>
+              </a:rPr>
+              <a:t>2</a:t>
+            </a:r>
+          </a:p>
+        </p:txBody>
+      </p:sp>
+      <p:sp>
+        <p:nvSpPr>
+          <p:cNvPr id="13" name="TextBox 12"/>
+          <p:cNvSpPr txBox="1"/>
+          <p:nvPr/>
+        </p:nvSpPr>
+        <p:spPr>
+          <a:xfrm>
+            <a:off x="1115568" y="2914650"/>
+            <a:ext cx="4480560" cy="811530"/>
+          </a:xfrm>
+          <a:prstGeom prst="rect">
+            <a:avLst/>
+          </a:prstGeom>
+          <a:noFill/>
+        </p:spPr>
+        <p:txBody>
+          <a:bodyPr wrap="square">
+            <a:spAutoFit/>
+          </a:bodyPr>
+          <a:lstStyle/>
+          <a:p>
+            <a:r>
+              <a:rPr sz="1600" b="1" i="0">
+                <a:solidFill>
+                  <a:srgbClr val="1A1A1A"/>
+                </a:solidFill>
+                <a:latin typeface="Arial"/>
+              </a:rPr>
+              <a:t>Break the task into named outputs.</a:t>
+            </a:r>
+          </a:p>
+        </p:txBody>
+      </p:sp>
+      <p:sp>
+        <p:nvSpPr>
+          <p:cNvPr id="14" name="Rectangle 13"/>
           <p:cNvSpPr/>
           <p:nvPr/>
         </p:nvSpPr>
         <p:spPr>
           <a:xfrm>
-            <a:off x="621792" y="4732020"/>
-            <a:ext cx="310896" cy="310896"/>
-          </a:xfrm>
-          <a:prstGeom prst="ellipse">
+            <a:off x="6099048" y="3006090"/>
+            <a:ext cx="54864" cy="674370"/>
+          </a:xfrm>
+          <a:prstGeom prst="rect">
             <a:avLst/>
           </a:prstGeom>
           <a:solidFill>
@@ -13385,6 +13349,425 @@
           </a:fontRef>
         </p:style>
         <p:txBody>
+          <a:bodyPr rtlCol="0" anchor="ctr"/>
+          <a:lstStyle/>
+          <a:p>
+            <a:pPr algn="ctr"/>
+          </a:p>
+        </p:txBody>
+      </p:sp>
+      <p:sp>
+        <p:nvSpPr>
+          <p:cNvPr id="15" name="Rectangle 14"/>
+          <p:cNvSpPr/>
+          <p:nvPr/>
+        </p:nvSpPr>
+        <p:spPr>
+          <a:xfrm>
+            <a:off x="5669280" y="3134106"/>
+            <a:ext cx="274320" cy="19050"/>
+          </a:xfrm>
+          <a:prstGeom prst="rect">
+            <a:avLst/>
+          </a:prstGeom>
+          <a:solidFill>
+            <a:srgbClr val="009CD6"/>
+          </a:solidFill>
+          <a:ln>
+            <a:noFill/>
+          </a:ln>
+          <a:effectLst/>
+        </p:spPr>
+        <p:style>
+          <a:lnRef idx="1">
+            <a:schemeClr val="accent1"/>
+          </a:lnRef>
+          <a:fillRef idx="3">
+            <a:schemeClr val="accent1"/>
+          </a:fillRef>
+          <a:effectRef idx="2">
+            <a:schemeClr val="accent1"/>
+          </a:effectRef>
+          <a:fontRef idx="minor">
+            <a:schemeClr val="lt1"/>
+          </a:fontRef>
+        </p:style>
+        <p:txBody>
+          <a:bodyPr rtlCol="0" anchor="ctr"/>
+          <a:lstStyle/>
+          <a:p>
+            <a:pPr algn="ctr"/>
+          </a:p>
+        </p:txBody>
+      </p:sp>
+      <p:sp>
+        <p:nvSpPr>
+          <p:cNvPr id="16" name="TextBox 15"/>
+          <p:cNvSpPr txBox="1"/>
+          <p:nvPr/>
+        </p:nvSpPr>
+        <p:spPr>
+          <a:xfrm>
+            <a:off x="6281928" y="2932938"/>
+            <a:ext cx="5047488" cy="811530"/>
+          </a:xfrm>
+          <a:prstGeom prst="rect">
+            <a:avLst/>
+          </a:prstGeom>
+          <a:noFill/>
+        </p:spPr>
+        <p:txBody>
+          <a:bodyPr wrap="square">
+            <a:spAutoFit/>
+          </a:bodyPr>
+          <a:lstStyle/>
+          <a:p>
+            <a:r>
+              <a:rPr sz="1500" b="0" i="1">
+                <a:solidFill>
+                  <a:srgbClr val="1A1A1A"/>
+                </a:solidFill>
+                <a:latin typeface="Arial"/>
+              </a:rPr>
+              <a:t>"Score the capabilities, list the gaps, rank them."</a:t>
+            </a:r>
+          </a:p>
+        </p:txBody>
+      </p:sp>
+      <p:sp>
+        <p:nvSpPr>
+          <p:cNvPr id="17" name="Rectangle 16"/>
+          <p:cNvSpPr/>
+          <p:nvPr/>
+        </p:nvSpPr>
+        <p:spPr>
+          <a:xfrm>
+            <a:off x="658368" y="3771900"/>
+            <a:ext cx="4937760" cy="12700"/>
+          </a:xfrm>
+          <a:prstGeom prst="rect">
+            <a:avLst/>
+          </a:prstGeom>
+          <a:solidFill>
+            <a:srgbClr val="DDECF4"/>
+          </a:solidFill>
+          <a:ln>
+            <a:noFill/>
+          </a:ln>
+          <a:effectLst/>
+        </p:spPr>
+        <p:style>
+          <a:lnRef idx="1">
+            <a:schemeClr val="accent1"/>
+          </a:lnRef>
+          <a:fillRef idx="3">
+            <a:schemeClr val="accent1"/>
+          </a:fillRef>
+          <a:effectRef idx="2">
+            <a:schemeClr val="accent1"/>
+          </a:effectRef>
+          <a:fontRef idx="minor">
+            <a:schemeClr val="lt1"/>
+          </a:fontRef>
+        </p:style>
+        <p:txBody>
+          <a:bodyPr rtlCol="0" anchor="ctr"/>
+          <a:lstStyle/>
+          <a:p>
+            <a:pPr algn="ctr"/>
+          </a:p>
+        </p:txBody>
+      </p:sp>
+      <p:sp>
+        <p:nvSpPr>
+          <p:cNvPr id="18" name="Oval 17"/>
+          <p:cNvSpPr/>
+          <p:nvPr/>
+        </p:nvSpPr>
+        <p:spPr>
+          <a:xfrm>
+            <a:off x="658368" y="3890772"/>
+            <a:ext cx="310896" cy="310896"/>
+          </a:xfrm>
+          <a:prstGeom prst="ellipse">
+            <a:avLst/>
+          </a:prstGeom>
+          <a:solidFill>
+            <a:srgbClr val="009CD6"/>
+          </a:solidFill>
+          <a:ln>
+            <a:noFill/>
+          </a:ln>
+          <a:effectLst/>
+        </p:spPr>
+        <p:style>
+          <a:lnRef idx="1">
+            <a:schemeClr val="accent1"/>
+          </a:lnRef>
+          <a:fillRef idx="3">
+            <a:schemeClr val="accent1"/>
+          </a:fillRef>
+          <a:effectRef idx="2">
+            <a:schemeClr val="accent1"/>
+          </a:effectRef>
+          <a:fontRef idx="minor">
+            <a:schemeClr val="lt1"/>
+          </a:fontRef>
+        </p:style>
+        <p:txBody>
+          <a:bodyPr rtlCol="0" anchor="ctr" lIns="0" rIns="0" tIns="0" bIns="0" wrap="square"/>
+          <a:lstStyle/>
+          <a:p>
+            <a:pPr algn="ctr"/>
+            <a:r>
+              <a:rPr sz="1300" b="1" i="0">
+                <a:solidFill>
+                  <a:srgbClr val="FFFFFF"/>
+                </a:solidFill>
+                <a:latin typeface="Arial"/>
+              </a:rPr>
+              <a:t>3</a:t>
+            </a:r>
+          </a:p>
+        </p:txBody>
+      </p:sp>
+      <p:sp>
+        <p:nvSpPr>
+          <p:cNvPr id="19" name="TextBox 18"/>
+          <p:cNvSpPr txBox="1"/>
+          <p:nvPr/>
+        </p:nvSpPr>
+        <p:spPr>
+          <a:xfrm>
+            <a:off x="1115568" y="3817620"/>
+            <a:ext cx="4480560" cy="811530"/>
+          </a:xfrm>
+          <a:prstGeom prst="rect">
+            <a:avLst/>
+          </a:prstGeom>
+          <a:noFill/>
+        </p:spPr>
+        <p:txBody>
+          <a:bodyPr wrap="square">
+            <a:spAutoFit/>
+          </a:bodyPr>
+          <a:lstStyle/>
+          <a:p>
+            <a:r>
+              <a:rPr sz="1600" b="1" i="0">
+                <a:solidFill>
+                  <a:srgbClr val="1A1A1A"/>
+                </a:solidFill>
+                <a:latin typeface="Arial"/>
+              </a:rPr>
+              <a:t>State the exact output format you want.</a:t>
+            </a:r>
+          </a:p>
+        </p:txBody>
+      </p:sp>
+      <p:sp>
+        <p:nvSpPr>
+          <p:cNvPr id="20" name="Rectangle 19"/>
+          <p:cNvSpPr/>
+          <p:nvPr/>
+        </p:nvSpPr>
+        <p:spPr>
+          <a:xfrm>
+            <a:off x="6099048" y="3909060"/>
+            <a:ext cx="54864" cy="674370"/>
+          </a:xfrm>
+          <a:prstGeom prst="rect">
+            <a:avLst/>
+          </a:prstGeom>
+          <a:solidFill>
+            <a:srgbClr val="009CD6"/>
+          </a:solidFill>
+          <a:ln>
+            <a:noFill/>
+          </a:ln>
+          <a:effectLst/>
+        </p:spPr>
+        <p:style>
+          <a:lnRef idx="1">
+            <a:schemeClr val="accent1"/>
+          </a:lnRef>
+          <a:fillRef idx="3">
+            <a:schemeClr val="accent1"/>
+          </a:fillRef>
+          <a:effectRef idx="2">
+            <a:schemeClr val="accent1"/>
+          </a:effectRef>
+          <a:fontRef idx="minor">
+            <a:schemeClr val="lt1"/>
+          </a:fontRef>
+        </p:style>
+        <p:txBody>
+          <a:bodyPr rtlCol="0" anchor="ctr"/>
+          <a:lstStyle/>
+          <a:p>
+            <a:pPr algn="ctr"/>
+          </a:p>
+        </p:txBody>
+      </p:sp>
+      <p:sp>
+        <p:nvSpPr>
+          <p:cNvPr id="21" name="Rectangle 20"/>
+          <p:cNvSpPr/>
+          <p:nvPr/>
+        </p:nvSpPr>
+        <p:spPr>
+          <a:xfrm>
+            <a:off x="5669280" y="4037076"/>
+            <a:ext cx="274320" cy="19050"/>
+          </a:xfrm>
+          <a:prstGeom prst="rect">
+            <a:avLst/>
+          </a:prstGeom>
+          <a:solidFill>
+            <a:srgbClr val="009CD6"/>
+          </a:solidFill>
+          <a:ln>
+            <a:noFill/>
+          </a:ln>
+          <a:effectLst/>
+        </p:spPr>
+        <p:style>
+          <a:lnRef idx="1">
+            <a:schemeClr val="accent1"/>
+          </a:lnRef>
+          <a:fillRef idx="3">
+            <a:schemeClr val="accent1"/>
+          </a:fillRef>
+          <a:effectRef idx="2">
+            <a:schemeClr val="accent1"/>
+          </a:effectRef>
+          <a:fontRef idx="minor">
+            <a:schemeClr val="lt1"/>
+          </a:fontRef>
+        </p:style>
+        <p:txBody>
+          <a:bodyPr rtlCol="0" anchor="ctr"/>
+          <a:lstStyle/>
+          <a:p>
+            <a:pPr algn="ctr"/>
+          </a:p>
+        </p:txBody>
+      </p:sp>
+      <p:sp>
+        <p:nvSpPr>
+          <p:cNvPr id="22" name="TextBox 21"/>
+          <p:cNvSpPr txBox="1"/>
+          <p:nvPr/>
+        </p:nvSpPr>
+        <p:spPr>
+          <a:xfrm>
+            <a:off x="6281928" y="3835908"/>
+            <a:ext cx="5047488" cy="811530"/>
+          </a:xfrm>
+          <a:prstGeom prst="rect">
+            <a:avLst/>
+          </a:prstGeom>
+          <a:noFill/>
+        </p:spPr>
+        <p:txBody>
+          <a:bodyPr wrap="square">
+            <a:spAutoFit/>
+          </a:bodyPr>
+          <a:lstStyle/>
+          <a:p>
+            <a:r>
+              <a:rPr sz="1500" b="0" i="1">
+                <a:solidFill>
+                  <a:srgbClr val="1A1A1A"/>
+                </a:solidFill>
+                <a:latin typeface="Arial"/>
+              </a:rPr>
+              <a:t>"A four-row table plus three bullets."</a:t>
+            </a:r>
+          </a:p>
+        </p:txBody>
+      </p:sp>
+      <p:sp>
+        <p:nvSpPr>
+          <p:cNvPr id="23" name="Rectangle 22"/>
+          <p:cNvSpPr/>
+          <p:nvPr/>
+        </p:nvSpPr>
+        <p:spPr>
+          <a:xfrm>
+            <a:off x="658368" y="4674870"/>
+            <a:ext cx="4937760" cy="12700"/>
+          </a:xfrm>
+          <a:prstGeom prst="rect">
+            <a:avLst/>
+          </a:prstGeom>
+          <a:solidFill>
+            <a:srgbClr val="DDECF4"/>
+          </a:solidFill>
+          <a:ln>
+            <a:noFill/>
+          </a:ln>
+          <a:effectLst/>
+        </p:spPr>
+        <p:style>
+          <a:lnRef idx="1">
+            <a:schemeClr val="accent1"/>
+          </a:lnRef>
+          <a:fillRef idx="3">
+            <a:schemeClr val="accent1"/>
+          </a:fillRef>
+          <a:effectRef idx="2">
+            <a:schemeClr val="accent1"/>
+          </a:effectRef>
+          <a:fontRef idx="minor">
+            <a:schemeClr val="lt1"/>
+          </a:fontRef>
+        </p:style>
+        <p:txBody>
+          <a:bodyPr rtlCol="0" anchor="ctr"/>
+          <a:lstStyle/>
+          <a:p>
+            <a:pPr algn="ctr"/>
+          </a:p>
+        </p:txBody>
+      </p:sp>
+      <p:sp>
+        <p:nvSpPr>
+          <p:cNvPr id="24" name="Oval 23"/>
+          <p:cNvSpPr/>
+          <p:nvPr/>
+        </p:nvSpPr>
+        <p:spPr>
+          <a:xfrm>
+            <a:off x="658368" y="4793742"/>
+            <a:ext cx="310896" cy="310896"/>
+          </a:xfrm>
+          <a:prstGeom prst="ellipse">
+            <a:avLst/>
+          </a:prstGeom>
+          <a:solidFill>
+            <a:srgbClr val="009CD6"/>
+          </a:solidFill>
+          <a:ln>
+            <a:noFill/>
+          </a:ln>
+          <a:effectLst/>
+        </p:spPr>
+        <p:style>
+          <a:lnRef idx="1">
+            <a:schemeClr val="accent1"/>
+          </a:lnRef>
+          <a:fillRef idx="3">
+            <a:schemeClr val="accent1"/>
+          </a:fillRef>
+          <a:effectRef idx="2">
+            <a:schemeClr val="accent1"/>
+          </a:effectRef>
+          <a:fontRef idx="minor">
+            <a:schemeClr val="lt1"/>
+          </a:fontRef>
+        </p:style>
+        <p:txBody>
           <a:bodyPr rtlCol="0" anchor="ctr" lIns="0" rIns="0" tIns="0" bIns="0" wrap="square"/>
           <a:lstStyle/>
           <a:p>
@@ -13403,14 +13786,14 @@
       </p:sp>
       <p:sp>
         <p:nvSpPr>
-          <p:cNvPr id="14" name="TextBox 13"/>
+          <p:cNvPr id="25" name="TextBox 24"/>
           <p:cNvSpPr txBox="1"/>
           <p:nvPr/>
         </p:nvSpPr>
         <p:spPr>
           <a:xfrm>
-            <a:off x="1115568" y="4686300"/>
-            <a:ext cx="10527487" cy="1028699"/>
+            <a:off x="1115568" y="4720590"/>
+            <a:ext cx="4480560" cy="811530"/>
           </a:xfrm>
           <a:prstGeom prst="rect">
             <a:avLst/>
@@ -13423,13 +13806,8 @@
           </a:bodyPr>
           <a:lstStyle/>
           <a:p>
-            <a:pPr>
-              <a:spcAft>
-                <a:spcPts val="300"/>
-              </a:spcAft>
-            </a:pPr>
-            <a:r>
-              <a:rPr sz="1900" b="1" i="0">
+            <a:r>
+              <a:rPr sz="1600" b="1" i="0">
                 <a:solidFill>
                   <a:srgbClr val="1A1A1A"/>
                 </a:solidFill>
@@ -13438,16 +13816,122 @@
               <a:t>Add a safeguard line for this prompt's specific risk.</a:t>
             </a:r>
           </a:p>
-          <a:p>
-            <a:pPr>
-              <a:spcAft>
-                <a:spcPts val="300"/>
-              </a:spcAft>
-            </a:pPr>
-            <a:r>
-              <a:rPr sz="1550" b="0" i="0">
+        </p:txBody>
+      </p:sp>
+      <p:sp>
+        <p:nvSpPr>
+          <p:cNvPr id="26" name="Rectangle 25"/>
+          <p:cNvSpPr/>
+          <p:nvPr/>
+        </p:nvSpPr>
+        <p:spPr>
+          <a:xfrm>
+            <a:off x="6099048" y="4812030"/>
+            <a:ext cx="54864" cy="674370"/>
+          </a:xfrm>
+          <a:prstGeom prst="rect">
+            <a:avLst/>
+          </a:prstGeom>
+          <a:solidFill>
+            <a:srgbClr val="009CD6"/>
+          </a:solidFill>
+          <a:ln>
+            <a:noFill/>
+          </a:ln>
+          <a:effectLst/>
+        </p:spPr>
+        <p:style>
+          <a:lnRef idx="1">
+            <a:schemeClr val="accent1"/>
+          </a:lnRef>
+          <a:fillRef idx="3">
+            <a:schemeClr val="accent1"/>
+          </a:fillRef>
+          <a:effectRef idx="2">
+            <a:schemeClr val="accent1"/>
+          </a:effectRef>
+          <a:fontRef idx="minor">
+            <a:schemeClr val="lt1"/>
+          </a:fontRef>
+        </p:style>
+        <p:txBody>
+          <a:bodyPr rtlCol="0" anchor="ctr"/>
+          <a:lstStyle/>
+          <a:p>
+            <a:pPr algn="ctr"/>
+          </a:p>
+        </p:txBody>
+      </p:sp>
+      <p:sp>
+        <p:nvSpPr>
+          <p:cNvPr id="27" name="Rectangle 26"/>
+          <p:cNvSpPr/>
+          <p:nvPr/>
+        </p:nvSpPr>
+        <p:spPr>
+          <a:xfrm>
+            <a:off x="5669280" y="4940046"/>
+            <a:ext cx="274320" cy="19050"/>
+          </a:xfrm>
+          <a:prstGeom prst="rect">
+            <a:avLst/>
+          </a:prstGeom>
+          <a:solidFill>
+            <a:srgbClr val="009CD6"/>
+          </a:solidFill>
+          <a:ln>
+            <a:noFill/>
+          </a:ln>
+          <a:effectLst/>
+        </p:spPr>
+        <p:style>
+          <a:lnRef idx="1">
+            <a:schemeClr val="accent1"/>
+          </a:lnRef>
+          <a:fillRef idx="3">
+            <a:schemeClr val="accent1"/>
+          </a:fillRef>
+          <a:effectRef idx="2">
+            <a:schemeClr val="accent1"/>
+          </a:effectRef>
+          <a:fontRef idx="minor">
+            <a:schemeClr val="lt1"/>
+          </a:fontRef>
+        </p:style>
+        <p:txBody>
+          <a:bodyPr rtlCol="0" anchor="ctr"/>
+          <a:lstStyle/>
+          <a:p>
+            <a:pPr algn="ctr"/>
+          </a:p>
+        </p:txBody>
+      </p:sp>
+      <p:sp>
+        <p:nvSpPr>
+          <p:cNvPr id="28" name="TextBox 27"/>
+          <p:cNvSpPr txBox="1"/>
+          <p:nvPr/>
+        </p:nvSpPr>
+        <p:spPr>
+          <a:xfrm>
+            <a:off x="6281928" y="4738878"/>
+            <a:ext cx="5047488" cy="811530"/>
+          </a:xfrm>
+          <a:prstGeom prst="rect">
+            <a:avLst/>
+          </a:prstGeom>
+          <a:noFill/>
+        </p:spPr>
+        <p:txBody>
+          <a:bodyPr wrap="square">
+            <a:spAutoFit/>
+          </a:bodyPr>
+          <a:lstStyle/>
+          <a:p>
+            <a:r>
+              <a:rPr sz="1500" b="0" i="1">
                 <a:solidFill>
-                  <a:srgbClr val="595959"/>
+                  <a:srgbClr val="1A1A1A"/>
                 </a:solidFill>
                 <a:latin typeface="Arial"/>
               </a:rPr>
@@ -13458,13 +13942,13 @@
       </p:sp>
       <p:sp>
         <p:nvSpPr>
-          <p:cNvPr id="15" name="TextBox 14"/>
+          <p:cNvPr id="29" name="TextBox 28"/>
           <p:cNvSpPr txBox="1"/>
           <p:nvPr/>
         </p:nvSpPr>
         <p:spPr>
           <a:xfrm>
-            <a:off x="658368" y="5870448"/>
+            <a:off x="658368" y="5760720"/>
             <a:ext cx="10881360" cy="548640"/>
           </a:xfrm>
           <a:prstGeom prst="rect">
@@ -13492,7 +13976,7 @@
       </p:sp>
       <p:sp>
         <p:nvSpPr>
-          <p:cNvPr id="16" name="TextBox 15"/>
+          <p:cNvPr id="30" name="TextBox 29"/>
           <p:cNvSpPr txBox="1"/>
           <p:nvPr/>
         </p:nvSpPr>
@@ -13622,69 +14106,14 @@
       </p:sp>
       <p:sp>
         <p:nvSpPr>
-          <p:cNvPr id="4" name="TextBox 3"/>
-          <p:cNvSpPr txBox="1"/>
-          <p:nvPr/>
-        </p:nvSpPr>
-        <p:spPr>
-          <a:xfrm>
-            <a:off x="658368" y="1600200"/>
-            <a:ext cx="10881360" cy="2651760"/>
-          </a:xfrm>
-          <a:prstGeom prst="rect">
-            <a:avLst/>
-          </a:prstGeom>
-          <a:noFill/>
-        </p:spPr>
-        <p:txBody>
-          <a:bodyPr wrap="square">
-            <a:spAutoFit/>
-          </a:bodyPr>
-          <a:lstStyle/>
-          <a:p>
-            <a:pPr>
-              <a:spcAft>
-                <a:spcPts val="1200"/>
-              </a:spcAft>
-            </a:pPr>
-            <a:r>
-              <a:rPr sz="2000" b="0" i="0">
-                <a:solidFill>
-                  <a:srgbClr val="1A1A1A"/>
-                </a:solidFill>
-                <a:latin typeface="Arial"/>
-              </a:rPr>
-              <a:t>For a gap analysis: a severity judgement about a powerful ministry must be checked with the decision-maker, not softened by the model.</a:t>
-            </a:r>
-          </a:p>
-          <a:p>
-            <a:pPr>
-              <a:spcAft>
-                <a:spcPts val="1200"/>
-              </a:spcAft>
-            </a:pPr>
-            <a:r>
-              <a:rPr sz="2000" b="0" i="0">
-                <a:solidFill>
-                  <a:srgbClr val="1A1A1A"/>
-                </a:solidFill>
-                <a:latin typeface="Arial"/>
-              </a:rPr>
-              <a:t>For a comparator card: discard any country example where the cited source does not actually say what the prompt claims.</a:t>
-            </a:r>
-          </a:p>
-        </p:txBody>
-      </p:sp>
-      <p:sp>
-        <p:nvSpPr>
-          <p:cNvPr id="5" name="Rounded Rectangle 4"/>
+          <p:cNvPr id="4" name="Rounded Rectangle 3"/>
           <p:cNvSpPr/>
           <p:nvPr/>
         </p:nvSpPr>
         <p:spPr>
           <a:xfrm>
-            <a:off x="658368" y="4434840"/>
-            <a:ext cx="10881360" cy="1325880"/>
+            <a:off x="658368" y="1554480"/>
+            <a:ext cx="5394960" cy="3977639"/>
           </a:xfrm>
           <a:prstGeom prst="roundRect">
             <a:avLst>
@@ -13723,14 +14152,14 @@
       </p:sp>
       <p:sp>
         <p:nvSpPr>
-          <p:cNvPr id="6" name="TextBox 5"/>
+          <p:cNvPr id="5" name="TextBox 4"/>
           <p:cNvSpPr txBox="1"/>
           <p:nvPr/>
         </p:nvSpPr>
         <p:spPr>
           <a:xfrm>
-            <a:off x="859536" y="4626864"/>
-            <a:ext cx="10479024" cy="1051560"/>
+            <a:off x="859536" y="1700784"/>
+            <a:ext cx="4992624" cy="3703320"/>
           </a:xfrm>
           <a:prstGeom prst="rect">
             <a:avLst/>
@@ -13749,7 +14178,222 @@
               </a:spcAft>
             </a:pPr>
             <a:r>
-              <a:rPr sz="2300" b="1" i="0">
+              <a:rPr sz="1900" b="1" i="0">
+                <a:solidFill>
+                  <a:srgbClr val="006E96"/>
+                </a:solidFill>
+                <a:latin typeface="Arial"/>
+              </a:rPr>
+              <a:t>FOR A GAP ANALYSIS</a:t>
+            </a:r>
+          </a:p>
+          <a:p>
+            <a:pPr>
+              <a:spcAft>
+                <a:spcPts val="700"/>
+              </a:spcAft>
+            </a:pPr>
+            <a:r>
+              <a:rPr sz="1600" b="0" i="0">
+                <a:solidFill>
+                  <a:srgbClr val="1A1A1A"/>
+                </a:solidFill>
+                <a:latin typeface="Arial"/>
+              </a:rPr>
+              <a:t>A severity judgement about a powerful ministry must be checked with the decision-maker.</a:t>
+            </a:r>
+          </a:p>
+          <a:p>
+            <a:pPr>
+              <a:spcAft>
+                <a:spcPts val="700"/>
+              </a:spcAft>
+            </a:pPr>
+            <a:r>
+              <a:rPr sz="1600" b="0" i="0">
+                <a:solidFill>
+                  <a:srgbClr val="1A1A1A"/>
+                </a:solidFill>
+                <a:latin typeface="Arial"/>
+              </a:rPr>
+              <a:t>Not softened by the model.</a:t>
+            </a:r>
+          </a:p>
+          <a:p>
+            <a:pPr>
+              <a:spcAft>
+                <a:spcPts val="700"/>
+              </a:spcAft>
+            </a:pPr>
+            <a:r>
+              <a:rPr sz="1600" b="0" i="0">
+                <a:solidFill>
+                  <a:srgbClr val="1A1A1A"/>
+                </a:solidFill>
+                <a:latin typeface="Arial"/>
+              </a:rPr>
+              <a:t>The trap here is a model being diplomatic about power.</a:t>
+            </a:r>
+          </a:p>
+        </p:txBody>
+      </p:sp>
+      <p:sp>
+        <p:nvSpPr>
+          <p:cNvPr id="6" name="Rounded Rectangle 5"/>
+          <p:cNvSpPr/>
+          <p:nvPr/>
+        </p:nvSpPr>
+        <p:spPr>
+          <a:xfrm>
+            <a:off x="6263640" y="1554480"/>
+            <a:ext cx="5394960" cy="3977639"/>
+          </a:xfrm>
+          <a:prstGeom prst="roundRect">
+            <a:avLst>
+              <a:gd name="adj" fmla="val 4500"/>
+            </a:avLst>
+          </a:prstGeom>
+          <a:solidFill>
+            <a:srgbClr val="F2F2F2"/>
+          </a:solidFill>
+          <a:ln>
+            <a:noFill/>
+          </a:ln>
+          <a:effectLst/>
+        </p:spPr>
+        <p:style>
+          <a:lnRef idx="1">
+            <a:schemeClr val="accent1"/>
+          </a:lnRef>
+          <a:fillRef idx="3">
+            <a:schemeClr val="accent1"/>
+          </a:fillRef>
+          <a:effectRef idx="2">
+            <a:schemeClr val="accent1"/>
+          </a:effectRef>
+          <a:fontRef idx="minor">
+            <a:schemeClr val="lt1"/>
+          </a:fontRef>
+        </p:style>
+        <p:txBody>
+          <a:bodyPr rtlCol="0" anchor="ctr"/>
+          <a:lstStyle/>
+          <a:p>
+            <a:pPr algn="ctr"/>
+          </a:p>
+        </p:txBody>
+      </p:sp>
+      <p:sp>
+        <p:nvSpPr>
+          <p:cNvPr id="7" name="TextBox 6"/>
+          <p:cNvSpPr txBox="1"/>
+          <p:nvPr/>
+        </p:nvSpPr>
+        <p:spPr>
+          <a:xfrm>
+            <a:off x="6464808" y="1700784"/>
+            <a:ext cx="4992624" cy="3703320"/>
+          </a:xfrm>
+          <a:prstGeom prst="rect">
+            <a:avLst/>
+          </a:prstGeom>
+          <a:noFill/>
+        </p:spPr>
+        <p:txBody>
+          <a:bodyPr wrap="square">
+            <a:spAutoFit/>
+          </a:bodyPr>
+          <a:lstStyle/>
+          <a:p>
+            <a:pPr>
+              <a:spcAft>
+                <a:spcPts val="700"/>
+              </a:spcAft>
+            </a:pPr>
+            <a:r>
+              <a:rPr sz="1900" b="1" i="0">
+                <a:solidFill>
+                  <a:srgbClr val="006E96"/>
+                </a:solidFill>
+                <a:latin typeface="Arial"/>
+              </a:rPr>
+              <a:t>FOR A COMPARATOR CARD</a:t>
+            </a:r>
+          </a:p>
+          <a:p>
+            <a:pPr>
+              <a:spcAft>
+                <a:spcPts val="700"/>
+              </a:spcAft>
+            </a:pPr>
+            <a:r>
+              <a:rPr sz="1600" b="0" i="0">
+                <a:solidFill>
+                  <a:srgbClr val="1A1A1A"/>
+                </a:solidFill>
+                <a:latin typeface="Arial"/>
+              </a:rPr>
+              <a:t>Discard any country example where the cited source does not actually say what the prompt claims.</a:t>
+            </a:r>
+          </a:p>
+          <a:p>
+            <a:pPr>
+              <a:spcAft>
+                <a:spcPts val="700"/>
+              </a:spcAft>
+            </a:pPr>
+            <a:r>
+              <a:rPr sz="1600" b="0" i="0">
+                <a:solidFill>
+                  <a:srgbClr val="1A1A1A"/>
+                </a:solidFill>
+                <a:latin typeface="Arial"/>
+              </a:rPr>
+              <a:t>Discard the claim, not just the citation.</a:t>
+            </a:r>
+          </a:p>
+          <a:p>
+            <a:pPr>
+              <a:spcAft>
+                <a:spcPts val="700"/>
+              </a:spcAft>
+            </a:pPr>
+            <a:r>
+              <a:rPr sz="1600" b="0" i="0">
+                <a:solidFill>
+                  <a:srgbClr val="1A1A1A"/>
+                </a:solidFill>
+                <a:latin typeface="Arial"/>
+              </a:rPr>
+              <a:t>The trap here is a fluent, invented source.</a:t>
+            </a:r>
+          </a:p>
+        </p:txBody>
+      </p:sp>
+      <p:sp>
+        <p:nvSpPr>
+          <p:cNvPr id="8" name="TextBox 7"/>
+          <p:cNvSpPr txBox="1"/>
+          <p:nvPr/>
+        </p:nvSpPr>
+        <p:spPr>
+          <a:xfrm>
+            <a:off x="658368" y="5715000"/>
+            <a:ext cx="10881360" cy="548640"/>
+          </a:xfrm>
+          <a:prstGeom prst="rect">
+            <a:avLst/>
+          </a:prstGeom>
+          <a:noFill/>
+        </p:spPr>
+        <p:txBody>
+          <a:bodyPr wrap="square">
+            <a:spAutoFit/>
+          </a:bodyPr>
+          <a:lstStyle/>
+          <a:p>
+            <a:r>
+              <a:rPr sz="1550" b="1" i="0">
                 <a:solidFill>
                   <a:srgbClr val="006E96"/>
                 </a:solidFill>
@@ -13762,7 +14406,7 @@
       </p:sp>
       <p:sp>
         <p:nvSpPr>
-          <p:cNvPr id="7" name="TextBox 6"/>
+          <p:cNvPr id="9" name="TextBox 8"/>
           <p:cNvSpPr txBox="1"/>
           <p:nvPr/>
         </p:nvSpPr>
@@ -13899,7 +14543,7 @@
         <p:spPr>
           <a:xfrm>
             <a:off x="658368" y="1600200"/>
-            <a:ext cx="10881360" cy="2651760"/>
+            <a:ext cx="10881360" cy="1984248"/>
           </a:xfrm>
           <a:prstGeom prst="rect">
             <a:avLst/>
@@ -13953,7 +14597,7 @@
         </p:nvSpPr>
         <p:spPr>
           <a:xfrm>
-            <a:off x="658368" y="4434840"/>
+            <a:off x="658368" y="3767328"/>
             <a:ext cx="10881360" cy="1325880"/>
           </a:xfrm>
           <a:prstGeom prst="roundRect">
@@ -13999,7 +14643,7 @@
         </p:nvSpPr>
         <p:spPr>
           <a:xfrm>
-            <a:off x="859536" y="4626864"/>
+            <a:off x="859536" y="3959352"/>
             <a:ext cx="10479024" cy="1051560"/>
           </a:xfrm>
           <a:prstGeom prst="rect">

--- a/10-Knowledge-Products/KP1-GEA/videos/module_5/en/decks/KP1_M5_5.1_Deck_v0.1.pptx
+++ b/10-Knowledge-Products/KP1-GEA/videos/module_5/en/decks/KP1_M5_5.1_Deck_v0.1.pptx
@@ -1003,19 +1003,19 @@
           <a:lstStyle/>
           <a:p>
             <a:r>
-              <a:t>VO, slide 1: AI can save you days of drafting on EA work, and it can also lead you confidently into a wrong answer. The difference is entirely in how you use it. So before any of the plays, learn the ground rules that make them safe — the small set of habits that turn AI from a risk into a fast, reliable drafting partner.</a:t>
+              <a:t>VO, slide 1: Before you commit your agency to this approach, you are right to ask one question: is it proven, or is it a consultant's theory? The honest answer is that the core of it has already been done — in countries large and small, unitary and federal, well-resourced and not. Look at what four real governments built, and the question changes from whether it works to how you apply it.</a:t>
             </a:r>
           </a:p>
           <a:p/>
           <a:p>
             <a:r>
-              <a:t>Retrieval prompt — ask before playing on: what is the difference between a safeguard that helps you and one that does nothing? Answer on the fourth slide.</a:t>
+              <a:t>On screen: the four countries appear as plain typography only — no flags, no national emblems, no agency logos. They are public examples cited to public sources, never the team's own engagements.</a:t>
             </a:r>
           </a:p>
           <a:p/>
           <a:p>
             <a:r>
-              <a:t>Production cue: this is the foundation video for the whole module. Every play that follows assumes the four-part prompt taught here.</a:t>
+              <a:t>On screen: the copy-paste prompt is not shown on a slide — it ships in the video description so the viewer can draft the artefact on the other half of the screen.</a:t>
             </a:r>
           </a:p>
         </p:txBody>
@@ -1085,7 +1085,13 @@
           <a:lstStyle/>
           <a:p>
             <a:r>
-              <a:t>VO: The first rule. AI is a drafting partner, not an oracle. It produces a strong first draft of a gap analysis, a board terms of reference, a business case — in minutes instead of days. What it does not produce is a finding you can trust without checking. It will state a wrong section number, a plausible but invented figure, a confident claim with no basis, in exactly the same tone as a correct one. The draft is where your work starts, not where it ends. Treat every output as a hypothesis to verify, never a fact to forward.</a:t>
+              <a:t>VO: Four signposts, deliberately different. Rwanda — a small country with a strong centre, one citizen-services platform, a national identity linked across services. Kenya — physical one-stop centres and a unifying identity programme, with results that are mixed and openly debated. South Africa — a federal state where no architecture can be imposed from the top, coordinated instead through a central agency and shared standards. And Estonia — a mature reference, distributed registries, the once-only principle, almost every service online. Four governments that could hardly be more different in size, resources and shape.</a:t>
+            </a:r>
+          </a:p>
+          <a:p/>
+          <a:p>
+            <a:r>
+              <a:t>Production cue: the first half of the module's centrepiece. Hold it a beat longer — the next slide is what turns these four into evidence.</a:t>
             </a:r>
           </a:p>
         </p:txBody>
@@ -1155,13 +1161,13 @@
           <a:lstStyle/>
           <a:p>
             <a:r>
-              <a:t>VO: Second, the shape of a good prompt. Every play in this module uses the same four parts. One — name the input you are pasting: below is my Discovery brief. Two — break the task into named outputs: score the capabilities, list the gaps, rank them. Three — state the exact output format you want: a four-row table plus three bullets. Four — add a safeguard line that names this prompt's specific risk. A prompt with these four parts gives you a usable artefact. A vague one — help me with my architecture — gives you vague mush.</a:t>
+              <a:t>VO: What makes them evidence is not that they are all the same — they are not — but that the same architectural elements show in every one. A small central team with real authority. A published framework that other agencies adopt rather than fight. A governance mechanism that is binding, not advisory. And a time horizon measured in years for full maturity, with intermediate results visible inside months. Four contexts, one recurring pattern. That recurrence is what tells you the pattern is real, not local luck.</a:t>
             </a:r>
           </a:p>
           <a:p/>
           <a:p>
             <a:r>
-              <a:t>Production cue: the centrepiece slide of the module. The four parts are shown as one prompt block on the right, bracketed part by part. Reveal the four parts one at a time and hold the finished slide a beat longer — every later video refers back to it.</a:t>
+              <a:t>Production cue: the centrepiece slide of the module. Reveal the four rows one at a time; the closing line is the whole argument of this video.</a:t>
             </a:r>
           </a:p>
         </p:txBody>
@@ -1231,13 +1237,7 @@
           <a:lstStyle/>
           <a:p>
             <a:r>
-              <a:t>VO: On that safeguard line — it is the most important part, and the easiest to get lazy about. A good safeguard names the specific way this specific prompt can mislead you. For a gap analysis: a severity judgement about a powerful ministry must be checked with the decision-maker, not softened by the model. For a comparator card: discard any country example where the cited source does not actually say what the prompt claims. The safeguard is not 'AI can make mistakes' — that helps no one. It is the one check that catches this play's particular trap.</a:t>
-            </a:r>
-          </a:p>
-          <a:p/>
-          <a:p>
-            <a:r>
-              <a:t>Production cue: this slide answers the retrieval prompt set on the title slide.</a:t>
+              <a:t>VO: And be honest about the mixed results, because that honesty is what makes the evidence trustworthy. Kenya's identity programme met real obstacles — in the courts, in parliament, in implementation — and the debate is public and documented. That is not a reason to dismiss the approach; it is part of the evidence. The programmes that struggled struggled for reasons you can learn from, and the reasons are remarkably consistent. The evidence is not a brochure of successes. It is a record of what works and what does not, which is far more useful to you.</a:t>
             </a:r>
           </a:p>
         </p:txBody>
@@ -1307,13 +1307,13 @@
           <a:lstStyle/>
           <a:p>
             <a:r>
-              <a:t>VO: Fourth, the rule that sits above all the others. You decide; the AI drafts. The AI can prepare the board paper, but the board rules. It can rank the gaps, but you defend the ranking. It can propose a sourcing call, but the architect and the EA Board own the decision. The moment you let the AI's output be the decision instead of the input to a decision, you have handed your judgement to a tool that has no accountability and cannot be questioned in a meeting. Use it to think faster, never to think less.</a:t>
+              <a:t>VO: What this means for your agency is simple and freeing. You are not the first. The path is charted, the common elements are known, and so are the common ways programmes fail. You are not being asked to invent an approach and hope it works. You are being asked to adapt a pattern that four very different governments have already shown delivers — to your country, your constraints, your sector. That is a far easier case to make to a minister than 'trust me, this should work'.</a:t>
             </a:r>
           </a:p>
           <a:p/>
           <a:p>
             <a:r>
-              <a:t>Production cue: the pivotal slide of this video — the rule the whole module sits under. Hold it a beat longer.</a:t>
+              <a:t>Production cue: the pivotal slide of this video. Hold it a beat longer.</a:t>
             </a:r>
           </a:p>
         </p:txBody>
@@ -1383,7 +1383,7 @@
           <a:lstStyle/>
           <a:p>
             <a:r>
-              <a:t>VO: So these are the ground rules. AI is a drafting partner, not an oracle. Use the four-part prompt. Make the safeguard specific. And keep the decision yours. Hold to these, and the plays in this module save you days without leading you astray. Forget them, and AI becomes a fast way to be confidently wrong.</a:t>
+              <a:t>VO: So when someone asks whether this is proven, you have an answer. Four governments, four shapes, one recurring pattern, with the failures as well documented as the successes. It is not theory. It is a charted path. Your job is not to prove it again — it is to apply it well.</a:t>
             </a:r>
           </a:p>
         </p:txBody>
@@ -11728,7 +11728,7 @@
                 </a:solidFill>
                 <a:latin typeface="Arial"/>
               </a:rPr>
-              <a:t>5.1 — Use AI as a drafting partner, not an oracle — the ground rules</a:t>
+              <a:t>5.1 — Is this proven, or just theory? — evidence from real programmes</a:t>
             </a:r>
           </a:p>
         </p:txBody>
@@ -11844,7 +11844,7 @@
                 </a:solidFill>
                 <a:latin typeface="Arial"/>
               </a:rPr>
-              <a:t>AI is a fast drafting partner for EA work, not an oracle — it produces a strong first draft you verify, never a finding you trust. Learn the four-part prompt pattern and the one rule that makes every play safe: you decide, the AI drafts.</a:t>
+              <a:t>This is not a theory waiting for its first trial. Across four very different governments the same architectural approach has already produced results — which means the question for you is not whether it works, but how to apply it where you are.</a:t>
             </a:r>
           </a:p>
         </p:txBody>
@@ -11941,7 +11941,7 @@
                 </a:solidFill>
                 <a:latin typeface="Arial"/>
               </a:rPr>
-              <a:t>Chief architect · senior architect · sector ICT lead</a:t>
+              <a:t>Director-general · head of a sectoral ICT unit · technical secretary</a:t>
             </a:r>
           </a:p>
         </p:txBody>
@@ -12019,7 +12019,7 @@
                 </a:solidFill>
                 <a:latin typeface="Arial"/>
               </a:rPr>
-              <a:t>THE FIVE PLAYS THIS MODULE TEACHES</a:t>
+              <a:t>THE CASE YOU CARRY INTO THE ROOM</a:t>
             </a:r>
           </a:p>
         </p:txBody>
@@ -12074,7 +12074,7 @@
                 </a:solidFill>
                 <a:latin typeface="Arial"/>
               </a:rPr>
-              <a:t>Play 1 — Discovery and Assess</a:t>
+              <a:t>Proven — four real governments</a:t>
             </a:r>
           </a:p>
         </p:txBody>
@@ -12129,7 +12129,7 @@
                 </a:solidFill>
                 <a:latin typeface="Arial"/>
               </a:rPr>
-              <a:t>Play 2 — the re-use business case</a:t>
+              <a:t>Portable — sector after sector</a:t>
             </a:r>
           </a:p>
         </p:txBody>
@@ -12184,7 +12184,7 @@
                 </a:solidFill>
                 <a:latin typeface="Arial"/>
               </a:rPr>
-              <a:t>Play 3 — minister and architects</a:t>
+              <a:t>The commitment — the one page</a:t>
             </a:r>
           </a:p>
         </p:txBody>
@@ -12239,7 +12239,7 @@
                 </a:solidFill>
                 <a:latin typeface="Arial"/>
               </a:rPr>
-              <a:t>Play 4 — the governance artefacts</a:t>
+              <a:t>The capability — your own people</a:t>
             </a:r>
           </a:p>
         </p:txBody>
@@ -12294,7 +12294,7 @@
                 </a:solidFill>
                 <a:latin typeface="Arial"/>
               </a:rPr>
-              <a:t>Play 5 — comparators and transfer</a:t>
+              <a:t>Necessary now, not just useful</a:t>
             </a:r>
           </a:p>
         </p:txBody>
@@ -12328,7 +12328,7 @@
                 </a:solidFill>
                 <a:latin typeface="Arial"/>
               </a:rPr>
-              <a:t>4-part prompt · 5 plays · 4 safeguards · you decide, the AI drafts</a:t>
+              <a:t>4 governments · 4 killers to design out · 1 page for the minister</a:t>
             </a:r>
           </a:p>
         </p:txBody>
@@ -12453,7 +12453,7 @@
                 </a:solidFill>
                 <a:latin typeface="Arial"/>
               </a:rPr>
-              <a:t>Use AI as a drafting partner, not an oracle — the ground rules</a:t>
+              <a:t>Is this proven, or just theory? — evidence from real programmes</a:t>
             </a:r>
           </a:p>
         </p:txBody>
@@ -12487,7 +12487,7 @@
                 </a:solidFill>
                 <a:latin typeface="Arial"/>
               </a:rPr>
-              <a:t>AI is a fast drafting partner for EA work, not an oracle — it produces a strong first draft you verify, never a finding you trust. Learn the four-part prompt pattern and the one rule that makes every play safe: you decide, the AI drafts.</a:t>
+              <a:t>This is not a theory waiting for its first trial. Across four very different governments the same architectural approach has already produced results — which means the question for you is not whether it works, but how to apply it where you are.</a:t>
             </a:r>
           </a:p>
         </p:txBody>
@@ -12617,7 +12617,7 @@
                 </a:solidFill>
                 <a:latin typeface="Arial"/>
               </a:rPr>
-              <a:t>It states a wrong figure in exactly the tone it states a right one</a:t>
+              <a:t>Four governments, four shapes</a:t>
             </a:r>
           </a:p>
         </p:txBody>
@@ -12630,8 +12630,8 @@
         </p:nvSpPr>
         <p:spPr>
           <a:xfrm>
-            <a:off x="658368" y="1600200"/>
-            <a:ext cx="10881360" cy="1673352"/>
+            <a:off x="658368" y="1463040"/>
+            <a:ext cx="10984687" cy="1028699"/>
           </a:xfrm>
           <a:prstGeom prst="rect">
             <a:avLst/>
@@ -12646,55 +12646,53 @@
           <a:p>
             <a:pPr>
               <a:spcAft>
-                <a:spcPts val="1200"/>
+                <a:spcPts val="300"/>
               </a:spcAft>
             </a:pPr>
             <a:r>
-              <a:rPr sz="2000" b="0" i="0">
+              <a:rPr sz="1900" b="1" i="0">
                 <a:solidFill>
                   <a:srgbClr val="1A1A1A"/>
                 </a:solidFill>
                 <a:latin typeface="Arial"/>
               </a:rPr>
-              <a:t>AI produces a strong first draft in minutes — a gap analysis, a terms of reference, a business case. What it does not produce is a finding you can trust without checking.</a:t>
+              <a:t>Rwanda — small, with a strong centre</a:t>
             </a:r>
           </a:p>
           <a:p>
             <a:pPr>
               <a:spcAft>
-                <a:spcPts val="1200"/>
+                <a:spcPts val="300"/>
               </a:spcAft>
             </a:pPr>
             <a:r>
-              <a:rPr sz="2000" b="0" i="0">
+              <a:rPr sz="1550" b="0" i="0">
                 <a:solidFill>
-                  <a:srgbClr val="1A1A1A"/>
+                  <a:srgbClr val="595959"/>
                 </a:solidFill>
                 <a:latin typeface="Arial"/>
               </a:rPr>
-              <a:t>A wrong section number, a plausible but invented figure, a confident claim with no basis — each arrives in exactly the same tone as a correct one.</a:t>
-            </a:r>
-          </a:p>
-        </p:txBody>
-      </p:sp>
-      <p:sp>
-        <p:nvSpPr>
-          <p:cNvPr id="5" name="Rounded Rectangle 4"/>
+              <a:t>One citizen-services platform; a national identity linked across services.</a:t>
+            </a:r>
+          </a:p>
+        </p:txBody>
+      </p:sp>
+      <p:sp>
+        <p:nvSpPr>
+          <p:cNvPr id="5" name="Rectangle 4"/>
           <p:cNvSpPr/>
           <p:nvPr/>
         </p:nvSpPr>
         <p:spPr>
           <a:xfrm>
-            <a:off x="658368" y="3456432"/>
-            <a:ext cx="10881360" cy="1325880"/>
-          </a:xfrm>
-          <a:prstGeom prst="roundRect">
-            <a:avLst>
-              <a:gd name="adj" fmla="val 4500"/>
-            </a:avLst>
+            <a:off x="621792" y="2496312"/>
+            <a:ext cx="10881360" cy="12700"/>
+          </a:xfrm>
+          <a:prstGeom prst="rect">
+            <a:avLst/>
           </a:prstGeom>
           <a:solidFill>
-            <a:srgbClr val="E5F5FB"/>
+            <a:srgbClr val="DDECF4"/>
           </a:solidFill>
           <a:ln>
             <a:noFill/>
@@ -12731,8 +12729,8 @@
         </p:nvSpPr>
         <p:spPr>
           <a:xfrm>
-            <a:off x="859536" y="3648456"/>
-            <a:ext cx="10479024" cy="1051560"/>
+            <a:off x="658368" y="2537460"/>
+            <a:ext cx="10984687" cy="1028699"/>
           </a:xfrm>
           <a:prstGeom prst="rect">
             <a:avLst/>
@@ -12747,24 +12745,272 @@
           <a:p>
             <a:pPr>
               <a:spcAft>
-                <a:spcPts val="700"/>
+                <a:spcPts val="300"/>
               </a:spcAft>
             </a:pPr>
             <a:r>
-              <a:rPr sz="2300" b="1" i="0">
+              <a:rPr sz="1900" b="1" i="0">
+                <a:solidFill>
+                  <a:srgbClr val="1A1A1A"/>
+                </a:solidFill>
+                <a:latin typeface="Arial"/>
+              </a:rPr>
+              <a:t>Kenya — one-stop centres and a unifying identity programme</a:t>
+            </a:r>
+          </a:p>
+          <a:p>
+            <a:pPr>
+              <a:spcAft>
+                <a:spcPts val="300"/>
+              </a:spcAft>
+            </a:pPr>
+            <a:r>
+              <a:rPr sz="1550" b="0" i="0">
+                <a:solidFill>
+                  <a:srgbClr val="595959"/>
+                </a:solidFill>
+                <a:latin typeface="Arial"/>
+              </a:rPr>
+              <a:t>Results mixed and openly debated.</a:t>
+            </a:r>
+          </a:p>
+        </p:txBody>
+      </p:sp>
+      <p:sp>
+        <p:nvSpPr>
+          <p:cNvPr id="7" name="Rectangle 6"/>
+          <p:cNvSpPr/>
+          <p:nvPr/>
+        </p:nvSpPr>
+        <p:spPr>
+          <a:xfrm>
+            <a:off x="621792" y="3570732"/>
+            <a:ext cx="10881360" cy="12700"/>
+          </a:xfrm>
+          <a:prstGeom prst="rect">
+            <a:avLst/>
+          </a:prstGeom>
+          <a:solidFill>
+            <a:srgbClr val="DDECF4"/>
+          </a:solidFill>
+          <a:ln>
+            <a:noFill/>
+          </a:ln>
+          <a:effectLst/>
+        </p:spPr>
+        <p:style>
+          <a:lnRef idx="1">
+            <a:schemeClr val="accent1"/>
+          </a:lnRef>
+          <a:fillRef idx="3">
+            <a:schemeClr val="accent1"/>
+          </a:fillRef>
+          <a:effectRef idx="2">
+            <a:schemeClr val="accent1"/>
+          </a:effectRef>
+          <a:fontRef idx="minor">
+            <a:schemeClr val="lt1"/>
+          </a:fontRef>
+        </p:style>
+        <p:txBody>
+          <a:bodyPr rtlCol="0" anchor="ctr"/>
+          <a:lstStyle/>
+          <a:p>
+            <a:pPr algn="ctr"/>
+          </a:p>
+        </p:txBody>
+      </p:sp>
+      <p:sp>
+        <p:nvSpPr>
+          <p:cNvPr id="8" name="TextBox 7"/>
+          <p:cNvSpPr txBox="1"/>
+          <p:nvPr/>
+        </p:nvSpPr>
+        <p:spPr>
+          <a:xfrm>
+            <a:off x="658368" y="3611879"/>
+            <a:ext cx="10984687" cy="1028699"/>
+          </a:xfrm>
+          <a:prstGeom prst="rect">
+            <a:avLst/>
+          </a:prstGeom>
+          <a:noFill/>
+        </p:spPr>
+        <p:txBody>
+          <a:bodyPr wrap="square">
+            <a:spAutoFit/>
+          </a:bodyPr>
+          <a:lstStyle/>
+          <a:p>
+            <a:pPr>
+              <a:spcAft>
+                <a:spcPts val="300"/>
+              </a:spcAft>
+            </a:pPr>
+            <a:r>
+              <a:rPr sz="1900" b="1" i="0">
+                <a:solidFill>
+                  <a:srgbClr val="1A1A1A"/>
+                </a:solidFill>
+                <a:latin typeface="Arial"/>
+              </a:rPr>
+              <a:t>South Africa — federal, so nothing can be imposed from the top</a:t>
+            </a:r>
+          </a:p>
+          <a:p>
+            <a:pPr>
+              <a:spcAft>
+                <a:spcPts val="300"/>
+              </a:spcAft>
+            </a:pPr>
+            <a:r>
+              <a:rPr sz="1550" b="0" i="0">
+                <a:solidFill>
+                  <a:srgbClr val="595959"/>
+                </a:solidFill>
+                <a:latin typeface="Arial"/>
+              </a:rPr>
+              <a:t>Coordinated instead through a central agency and shared standards.</a:t>
+            </a:r>
+          </a:p>
+        </p:txBody>
+      </p:sp>
+      <p:sp>
+        <p:nvSpPr>
+          <p:cNvPr id="9" name="Rectangle 8"/>
+          <p:cNvSpPr/>
+          <p:nvPr/>
+        </p:nvSpPr>
+        <p:spPr>
+          <a:xfrm>
+            <a:off x="621792" y="4645152"/>
+            <a:ext cx="10881360" cy="12700"/>
+          </a:xfrm>
+          <a:prstGeom prst="rect">
+            <a:avLst/>
+          </a:prstGeom>
+          <a:solidFill>
+            <a:srgbClr val="DDECF4"/>
+          </a:solidFill>
+          <a:ln>
+            <a:noFill/>
+          </a:ln>
+          <a:effectLst/>
+        </p:spPr>
+        <p:style>
+          <a:lnRef idx="1">
+            <a:schemeClr val="accent1"/>
+          </a:lnRef>
+          <a:fillRef idx="3">
+            <a:schemeClr val="accent1"/>
+          </a:fillRef>
+          <a:effectRef idx="2">
+            <a:schemeClr val="accent1"/>
+          </a:effectRef>
+          <a:fontRef idx="minor">
+            <a:schemeClr val="lt1"/>
+          </a:fontRef>
+        </p:style>
+        <p:txBody>
+          <a:bodyPr rtlCol="0" anchor="ctr"/>
+          <a:lstStyle/>
+          <a:p>
+            <a:pPr algn="ctr"/>
+          </a:p>
+        </p:txBody>
+      </p:sp>
+      <p:sp>
+        <p:nvSpPr>
+          <p:cNvPr id="10" name="TextBox 9"/>
+          <p:cNvSpPr txBox="1"/>
+          <p:nvPr/>
+        </p:nvSpPr>
+        <p:spPr>
+          <a:xfrm>
+            <a:off x="658368" y="4686300"/>
+            <a:ext cx="10984687" cy="1028699"/>
+          </a:xfrm>
+          <a:prstGeom prst="rect">
+            <a:avLst/>
+          </a:prstGeom>
+          <a:noFill/>
+        </p:spPr>
+        <p:txBody>
+          <a:bodyPr wrap="square">
+            <a:spAutoFit/>
+          </a:bodyPr>
+          <a:lstStyle/>
+          <a:p>
+            <a:pPr>
+              <a:spcAft>
+                <a:spcPts val="300"/>
+              </a:spcAft>
+            </a:pPr>
+            <a:r>
+              <a:rPr sz="1900" b="1" i="0">
+                <a:solidFill>
+                  <a:srgbClr val="1A1A1A"/>
+                </a:solidFill>
+                <a:latin typeface="Arial"/>
+              </a:rPr>
+              <a:t>Estonia — mature, and the reference the others are measured against</a:t>
+            </a:r>
+          </a:p>
+          <a:p>
+            <a:pPr>
+              <a:spcAft>
+                <a:spcPts val="300"/>
+              </a:spcAft>
+            </a:pPr>
+            <a:r>
+              <a:rPr sz="1550" b="0" i="0">
+                <a:solidFill>
+                  <a:srgbClr val="595959"/>
+                </a:solidFill>
+                <a:latin typeface="Arial"/>
+              </a:rPr>
+              <a:t>Distributed registries; the once-only principle; almost every service online.</a:t>
+            </a:r>
+          </a:p>
+        </p:txBody>
+      </p:sp>
+      <p:sp>
+        <p:nvSpPr>
+          <p:cNvPr id="11" name="TextBox 10"/>
+          <p:cNvSpPr txBox="1"/>
+          <p:nvPr/>
+        </p:nvSpPr>
+        <p:spPr>
+          <a:xfrm>
+            <a:off x="658368" y="5870448"/>
+            <a:ext cx="10881360" cy="548640"/>
+          </a:xfrm>
+          <a:prstGeom prst="rect">
+            <a:avLst/>
+          </a:prstGeom>
+          <a:noFill/>
+        </p:spPr>
+        <p:txBody>
+          <a:bodyPr wrap="square">
+            <a:spAutoFit/>
+          </a:bodyPr>
+          <a:lstStyle/>
+          <a:p>
+            <a:r>
+              <a:rPr sz="1550" b="1" i="0">
                 <a:solidFill>
                   <a:srgbClr val="006E96"/>
                 </a:solidFill>
                 <a:latin typeface="Arial"/>
               </a:rPr>
-              <a:t>The draft is where your work starts, not where it ends.</a:t>
-            </a:r>
-          </a:p>
-        </p:txBody>
-      </p:sp>
-      <p:sp>
-        <p:nvSpPr>
-          <p:cNvPr id="7" name="TextBox 6"/>
+              <a:t>Four governments that could hardly differ more in size, resources and shape.</a:t>
+            </a:r>
+          </a:p>
+        </p:txBody>
+      </p:sp>
+      <p:sp>
+        <p:nvSpPr>
+          <p:cNvPr id="12" name="TextBox 11"/>
           <p:cNvSpPr txBox="1"/>
           <p:nvPr/>
         </p:nvSpPr>
@@ -12791,7 +13037,7 @@
                 </a:solidFill>
                 <a:latin typeface="Arial"/>
               </a:rPr>
-              <a:t>5.1 · Use AI as a drafting partner, not an oracle</a:t>
+              <a:t>5.1 · Is this proven, or just theory? — evidence from real programmes</a:t>
             </a:r>
           </a:p>
         </p:txBody>
@@ -12887,29 +13133,27 @@
                 </a:solidFill>
                 <a:latin typeface="Arial"/>
               </a:rPr>
-              <a:t>Every play in this module uses the same four-part prompt</a:t>
-            </a:r>
-          </a:p>
-        </p:txBody>
-      </p:sp>
-      <p:sp>
-        <p:nvSpPr>
-          <p:cNvPr id="4" name="Rounded Rectangle 3"/>
+              <a:t>The same four elements show in every one</a:t>
+            </a:r>
+          </a:p>
+        </p:txBody>
+      </p:sp>
+      <p:sp>
+        <p:nvSpPr>
+          <p:cNvPr id="4" name="Oval 3"/>
           <p:cNvSpPr/>
           <p:nvPr/>
         </p:nvSpPr>
         <p:spPr>
           <a:xfrm>
-            <a:off x="5989320" y="1508760"/>
-            <a:ext cx="5550408" cy="4114800"/>
-          </a:xfrm>
-          <a:prstGeom prst="roundRect">
-            <a:avLst>
-              <a:gd name="adj" fmla="val 3000"/>
-            </a:avLst>
+            <a:off x="621792" y="1508760"/>
+            <a:ext cx="310896" cy="310896"/>
+          </a:xfrm>
+          <a:prstGeom prst="ellipse">
+            <a:avLst/>
           </a:prstGeom>
           <a:solidFill>
-            <a:srgbClr val="F2F2F2"/>
+            <a:srgbClr val="009CD6"/>
           </a:solidFill>
           <a:ln>
             <a:noFill/>
@@ -12931,10 +13175,19 @@
           </a:fontRef>
         </p:style>
         <p:txBody>
-          <a:bodyPr rtlCol="0" anchor="ctr"/>
+          <a:bodyPr rtlCol="0" anchor="ctr" lIns="0" rIns="0" tIns="0" bIns="0" wrap="square"/>
           <a:lstStyle/>
           <a:p>
             <a:pPr algn="ctr"/>
+            <a:r>
+              <a:rPr sz="1300" b="1" i="0">
+                <a:solidFill>
+                  <a:srgbClr val="FFFFFF"/>
+                </a:solidFill>
+                <a:latin typeface="Arial"/>
+              </a:rPr>
+              <a:t>1</a:t>
+            </a:r>
           </a:p>
         </p:txBody>
       </p:sp>
@@ -12946,8 +13199,8 @@
         </p:nvSpPr>
         <p:spPr>
           <a:xfrm>
-            <a:off x="6217920" y="1618488"/>
-            <a:ext cx="5093208" cy="320040"/>
+            <a:off x="1115568" y="1463040"/>
+            <a:ext cx="10527487" cy="1028699"/>
           </a:xfrm>
           <a:prstGeom prst="rect">
             <a:avLst/>
@@ -12960,34 +13213,55 @@
           </a:bodyPr>
           <a:lstStyle/>
           <a:p>
-            <a:r>
-              <a:rPr sz="1050" b="1" i="0">
+            <a:pPr>
+              <a:spcAft>
+                <a:spcPts val="300"/>
+              </a:spcAft>
+            </a:pPr>
+            <a:r>
+              <a:rPr sz="1900" b="1" i="0">
+                <a:solidFill>
+                  <a:srgbClr val="1A1A1A"/>
+                </a:solidFill>
+                <a:latin typeface="Arial"/>
+              </a:rPr>
+              <a:t>A small central team with real authority</a:t>
+            </a:r>
+          </a:p>
+          <a:p>
+            <a:pPr>
+              <a:spcAft>
+                <a:spcPts val="300"/>
+              </a:spcAft>
+            </a:pPr>
+            <a:r>
+              <a:rPr sz="1550" b="0" i="0">
                 <a:solidFill>
                   <a:srgbClr val="595959"/>
                 </a:solidFill>
                 <a:latin typeface="Arial"/>
               </a:rPr>
-              <a:t>THE PROMPT, AS PASTED</a:t>
-            </a:r>
-          </a:p>
-        </p:txBody>
-      </p:sp>
-      <p:sp>
-        <p:nvSpPr>
-          <p:cNvPr id="6" name="Oval 5"/>
+              <a:t>Not a committee, and not a contractor.</a:t>
+            </a:r>
+          </a:p>
+        </p:txBody>
+      </p:sp>
+      <p:sp>
+        <p:nvSpPr>
+          <p:cNvPr id="6" name="Rectangle 5"/>
           <p:cNvSpPr/>
           <p:nvPr/>
         </p:nvSpPr>
         <p:spPr>
           <a:xfrm>
-            <a:off x="658368" y="2084832"/>
-            <a:ext cx="310896" cy="310896"/>
-          </a:xfrm>
-          <a:prstGeom prst="ellipse">
+            <a:off x="621792" y="2496312"/>
+            <a:ext cx="10881360" cy="12700"/>
+          </a:xfrm>
+          <a:prstGeom prst="rect">
             <a:avLst/>
           </a:prstGeom>
           <a:solidFill>
-            <a:srgbClr val="009CD6"/>
+            <a:srgbClr val="DDECF4"/>
           </a:solidFill>
           <a:ln>
             <a:noFill/>
@@ -13009,68 +13283,25 @@
           </a:fontRef>
         </p:style>
         <p:txBody>
-          <a:bodyPr rtlCol="0" anchor="ctr" lIns="0" rIns="0" tIns="0" bIns="0" wrap="square"/>
+          <a:bodyPr rtlCol="0" anchor="ctr"/>
           <a:lstStyle/>
           <a:p>
             <a:pPr algn="ctr"/>
-            <a:r>
-              <a:rPr sz="1300" b="1" i="0">
-                <a:solidFill>
-                  <a:srgbClr val="FFFFFF"/>
-                </a:solidFill>
-                <a:latin typeface="Arial"/>
-              </a:rPr>
-              <a:t>1</a:t>
-            </a:r>
-          </a:p>
-        </p:txBody>
-      </p:sp>
-      <p:sp>
-        <p:nvSpPr>
-          <p:cNvPr id="7" name="TextBox 6"/>
-          <p:cNvSpPr txBox="1"/>
-          <p:nvPr/>
-        </p:nvSpPr>
-        <p:spPr>
-          <a:xfrm>
-            <a:off x="1115568" y="2011680"/>
-            <a:ext cx="4480560" cy="811530"/>
-          </a:xfrm>
-          <a:prstGeom prst="rect">
-            <a:avLst/>
-          </a:prstGeom>
-          <a:noFill/>
-        </p:spPr>
-        <p:txBody>
-          <a:bodyPr wrap="square">
-            <a:spAutoFit/>
-          </a:bodyPr>
-          <a:lstStyle/>
-          <a:p>
-            <a:r>
-              <a:rPr sz="1600" b="1" i="0">
-                <a:solidFill>
-                  <a:srgbClr val="1A1A1A"/>
-                </a:solidFill>
-                <a:latin typeface="Arial"/>
-              </a:rPr>
-              <a:t>Name the input you are pasting.</a:t>
-            </a:r>
-          </a:p>
-        </p:txBody>
-      </p:sp>
-      <p:sp>
-        <p:nvSpPr>
-          <p:cNvPr id="8" name="Rectangle 7"/>
+          </a:p>
+        </p:txBody>
+      </p:sp>
+      <p:sp>
+        <p:nvSpPr>
+          <p:cNvPr id="7" name="Oval 6"/>
           <p:cNvSpPr/>
           <p:nvPr/>
         </p:nvSpPr>
         <p:spPr>
           <a:xfrm>
-            <a:off x="6099048" y="2103120"/>
-            <a:ext cx="54864" cy="674370"/>
-          </a:xfrm>
-          <a:prstGeom prst="rect">
+            <a:off x="621792" y="2583179"/>
+            <a:ext cx="310896" cy="310896"/>
+          </a:xfrm>
+          <a:prstGeom prst="ellipse">
             <a:avLst/>
           </a:prstGeom>
           <a:solidFill>
@@ -13096,10 +13327,74 @@
           </a:fontRef>
         </p:style>
         <p:txBody>
-          <a:bodyPr rtlCol="0" anchor="ctr"/>
+          <a:bodyPr rtlCol="0" anchor="ctr" lIns="0" rIns="0" tIns="0" bIns="0" wrap="square"/>
           <a:lstStyle/>
           <a:p>
             <a:pPr algn="ctr"/>
+            <a:r>
+              <a:rPr sz="1300" b="1" i="0">
+                <a:solidFill>
+                  <a:srgbClr val="FFFFFF"/>
+                </a:solidFill>
+                <a:latin typeface="Arial"/>
+              </a:rPr>
+              <a:t>2</a:t>
+            </a:r>
+          </a:p>
+        </p:txBody>
+      </p:sp>
+      <p:sp>
+        <p:nvSpPr>
+          <p:cNvPr id="8" name="TextBox 7"/>
+          <p:cNvSpPr txBox="1"/>
+          <p:nvPr/>
+        </p:nvSpPr>
+        <p:spPr>
+          <a:xfrm>
+            <a:off x="1115568" y="2537460"/>
+            <a:ext cx="10527487" cy="1028699"/>
+          </a:xfrm>
+          <a:prstGeom prst="rect">
+            <a:avLst/>
+          </a:prstGeom>
+          <a:noFill/>
+        </p:spPr>
+        <p:txBody>
+          <a:bodyPr wrap="square">
+            <a:spAutoFit/>
+          </a:bodyPr>
+          <a:lstStyle/>
+          <a:p>
+            <a:pPr>
+              <a:spcAft>
+                <a:spcPts val="300"/>
+              </a:spcAft>
+            </a:pPr>
+            <a:r>
+              <a:rPr sz="1900" b="1" i="0">
+                <a:solidFill>
+                  <a:srgbClr val="1A1A1A"/>
+                </a:solidFill>
+                <a:latin typeface="Arial"/>
+              </a:rPr>
+              <a:t>A published framework other agencies adopt</a:t>
+            </a:r>
+          </a:p>
+          <a:p>
+            <a:pPr>
+              <a:spcAft>
+                <a:spcPts val="300"/>
+              </a:spcAft>
+            </a:pPr>
+            <a:r>
+              <a:rPr sz="1550" b="0" i="0">
+                <a:solidFill>
+                  <a:srgbClr val="595959"/>
+                </a:solidFill>
+                <a:latin typeface="Arial"/>
+              </a:rPr>
+              <a:t>Adopted because it helps them, not because it is forced on them.</a:t>
+            </a:r>
           </a:p>
         </p:txBody>
       </p:sp>
@@ -13111,14 +13406,14 @@
         </p:nvSpPr>
         <p:spPr>
           <a:xfrm>
-            <a:off x="5669280" y="2231136"/>
-            <a:ext cx="274320" cy="19050"/>
+            <a:off x="621792" y="3570732"/>
+            <a:ext cx="10881360" cy="12700"/>
           </a:xfrm>
           <a:prstGeom prst="rect">
             <a:avLst/>
           </a:prstGeom>
           <a:solidFill>
-            <a:srgbClr val="009CD6"/>
+            <a:srgbClr val="DDECF4"/>
           </a:solidFill>
           <a:ln>
             <a:noFill/>
@@ -13149,54 +13444,20 @@
       </p:sp>
       <p:sp>
         <p:nvSpPr>
-          <p:cNvPr id="10" name="TextBox 9"/>
-          <p:cNvSpPr txBox="1"/>
-          <p:nvPr/>
-        </p:nvSpPr>
-        <p:spPr>
-          <a:xfrm>
-            <a:off x="6281928" y="2029968"/>
-            <a:ext cx="5047488" cy="811530"/>
-          </a:xfrm>
-          <a:prstGeom prst="rect">
-            <a:avLst/>
-          </a:prstGeom>
-          <a:noFill/>
-        </p:spPr>
-        <p:txBody>
-          <a:bodyPr wrap="square">
-            <a:spAutoFit/>
-          </a:bodyPr>
-          <a:lstStyle/>
-          <a:p>
-            <a:r>
-              <a:rPr sz="1500" b="0" i="1">
-                <a:solidFill>
-                  <a:srgbClr val="1A1A1A"/>
-                </a:solidFill>
-                <a:latin typeface="Arial"/>
-              </a:rPr>
-              <a:t>"Below is my Discovery brief for the education sector."</a:t>
-            </a:r>
-          </a:p>
-        </p:txBody>
-      </p:sp>
-      <p:sp>
-        <p:nvSpPr>
-          <p:cNvPr id="11" name="Rectangle 10"/>
+          <p:cNvPr id="10" name="Oval 9"/>
           <p:cNvSpPr/>
           <p:nvPr/>
         </p:nvSpPr>
         <p:spPr>
           <a:xfrm>
-            <a:off x="658368" y="2868930"/>
-            <a:ext cx="4937760" cy="12700"/>
-          </a:xfrm>
-          <a:prstGeom prst="rect">
+            <a:off x="621792" y="3657599"/>
+            <a:ext cx="310896" cy="310896"/>
+          </a:xfrm>
+          <a:prstGeom prst="ellipse">
             <a:avLst/>
           </a:prstGeom>
           <a:solidFill>
-            <a:srgbClr val="DDECF4"/>
+            <a:srgbClr val="009CD6"/>
           </a:solidFill>
           <a:ln>
             <a:noFill/>
@@ -13218,29 +13479,93 @@
           </a:fontRef>
         </p:style>
         <p:txBody>
-          <a:bodyPr rtlCol="0" anchor="ctr"/>
+          <a:bodyPr rtlCol="0" anchor="ctr" lIns="0" rIns="0" tIns="0" bIns="0" wrap="square"/>
           <a:lstStyle/>
           <a:p>
             <a:pPr algn="ctr"/>
-          </a:p>
-        </p:txBody>
-      </p:sp>
-      <p:sp>
-        <p:nvSpPr>
-          <p:cNvPr id="12" name="Oval 11"/>
+            <a:r>
+              <a:rPr sz="1300" b="1" i="0">
+                <a:solidFill>
+                  <a:srgbClr val="FFFFFF"/>
+                </a:solidFill>
+                <a:latin typeface="Arial"/>
+              </a:rPr>
+              <a:t>3</a:t>
+            </a:r>
+          </a:p>
+        </p:txBody>
+      </p:sp>
+      <p:sp>
+        <p:nvSpPr>
+          <p:cNvPr id="11" name="TextBox 10"/>
+          <p:cNvSpPr txBox="1"/>
+          <p:nvPr/>
+        </p:nvSpPr>
+        <p:spPr>
+          <a:xfrm>
+            <a:off x="1115568" y="3611879"/>
+            <a:ext cx="10527487" cy="1028699"/>
+          </a:xfrm>
+          <a:prstGeom prst="rect">
+            <a:avLst/>
+          </a:prstGeom>
+          <a:noFill/>
+        </p:spPr>
+        <p:txBody>
+          <a:bodyPr wrap="square">
+            <a:spAutoFit/>
+          </a:bodyPr>
+          <a:lstStyle/>
+          <a:p>
+            <a:pPr>
+              <a:spcAft>
+                <a:spcPts val="300"/>
+              </a:spcAft>
+            </a:pPr>
+            <a:r>
+              <a:rPr sz="1900" b="1" i="0">
+                <a:solidFill>
+                  <a:srgbClr val="1A1A1A"/>
+                </a:solidFill>
+                <a:latin typeface="Arial"/>
+              </a:rPr>
+              <a:t>Governance that is binding, not advisory</a:t>
+            </a:r>
+          </a:p>
+          <a:p>
+            <a:pPr>
+              <a:spcAft>
+                <a:spcPts val="300"/>
+              </a:spcAft>
+            </a:pPr>
+            <a:r>
+              <a:rPr sz="1550" b="0" i="0">
+                <a:solidFill>
+                  <a:srgbClr val="595959"/>
+                </a:solidFill>
+                <a:latin typeface="Arial"/>
+              </a:rPr>
+              <a:t>It can say no to a project that would fragment the architecture.</a:t>
+            </a:r>
+          </a:p>
+        </p:txBody>
+      </p:sp>
+      <p:sp>
+        <p:nvSpPr>
+          <p:cNvPr id="12" name="Rectangle 11"/>
           <p:cNvSpPr/>
           <p:nvPr/>
         </p:nvSpPr>
         <p:spPr>
           <a:xfrm>
-            <a:off x="658368" y="2987802"/>
-            <a:ext cx="310896" cy="310896"/>
-          </a:xfrm>
-          <a:prstGeom prst="ellipse">
+            <a:off x="621792" y="4645152"/>
+            <a:ext cx="10881360" cy="12700"/>
+          </a:xfrm>
+          <a:prstGeom prst="rect">
             <a:avLst/>
           </a:prstGeom>
           <a:solidFill>
-            <a:srgbClr val="009CD6"/>
+            <a:srgbClr val="DDECF4"/>
           </a:solidFill>
           <a:ln>
             <a:noFill/>
@@ -13262,68 +13587,25 @@
           </a:fontRef>
         </p:style>
         <p:txBody>
-          <a:bodyPr rtlCol="0" anchor="ctr" lIns="0" rIns="0" tIns="0" bIns="0" wrap="square"/>
+          <a:bodyPr rtlCol="0" anchor="ctr"/>
           <a:lstStyle/>
           <a:p>
             <a:pPr algn="ctr"/>
-            <a:r>
-              <a:rPr sz="1300" b="1" i="0">
-                <a:solidFill>
-                  <a:srgbClr val="FFFFFF"/>
-                </a:solidFill>
-                <a:latin typeface="Arial"/>
-              </a:rPr>
-              <a:t>2</a:t>
-            </a:r>
-          </a:p>
-        </p:txBody>
-      </p:sp>
-      <p:sp>
-        <p:nvSpPr>
-          <p:cNvPr id="13" name="TextBox 12"/>
-          <p:cNvSpPr txBox="1"/>
-          <p:nvPr/>
-        </p:nvSpPr>
-        <p:spPr>
-          <a:xfrm>
-            <a:off x="1115568" y="2914650"/>
-            <a:ext cx="4480560" cy="811530"/>
-          </a:xfrm>
-          <a:prstGeom prst="rect">
-            <a:avLst/>
-          </a:prstGeom>
-          <a:noFill/>
-        </p:spPr>
-        <p:txBody>
-          <a:bodyPr wrap="square">
-            <a:spAutoFit/>
-          </a:bodyPr>
-          <a:lstStyle/>
-          <a:p>
-            <a:r>
-              <a:rPr sz="1600" b="1" i="0">
-                <a:solidFill>
-                  <a:srgbClr val="1A1A1A"/>
-                </a:solidFill>
-                <a:latin typeface="Arial"/>
-              </a:rPr>
-              <a:t>Break the task into named outputs.</a:t>
-            </a:r>
-          </a:p>
-        </p:txBody>
-      </p:sp>
-      <p:sp>
-        <p:nvSpPr>
-          <p:cNvPr id="14" name="Rectangle 13"/>
+          </a:p>
+        </p:txBody>
+      </p:sp>
+      <p:sp>
+        <p:nvSpPr>
+          <p:cNvPr id="13" name="Oval 12"/>
           <p:cNvSpPr/>
           <p:nvPr/>
         </p:nvSpPr>
         <p:spPr>
           <a:xfrm>
-            <a:off x="6099048" y="3006090"/>
-            <a:ext cx="54864" cy="674370"/>
-          </a:xfrm>
-          <a:prstGeom prst="rect">
+            <a:off x="621792" y="4732020"/>
+            <a:ext cx="310896" cy="310896"/>
+          </a:xfrm>
+          <a:prstGeom prst="ellipse">
             <a:avLst/>
           </a:prstGeom>
           <a:solidFill>
@@ -13349,425 +13631,6 @@
           </a:fontRef>
         </p:style>
         <p:txBody>
-          <a:bodyPr rtlCol="0" anchor="ctr"/>
-          <a:lstStyle/>
-          <a:p>
-            <a:pPr algn="ctr"/>
-          </a:p>
-        </p:txBody>
-      </p:sp>
-      <p:sp>
-        <p:nvSpPr>
-          <p:cNvPr id="15" name="Rectangle 14"/>
-          <p:cNvSpPr/>
-          <p:nvPr/>
-        </p:nvSpPr>
-        <p:spPr>
-          <a:xfrm>
-            <a:off x="5669280" y="3134106"/>
-            <a:ext cx="274320" cy="19050"/>
-          </a:xfrm>
-          <a:prstGeom prst="rect">
-            <a:avLst/>
-          </a:prstGeom>
-          <a:solidFill>
-            <a:srgbClr val="009CD6"/>
-          </a:solidFill>
-          <a:ln>
-            <a:noFill/>
-          </a:ln>
-          <a:effectLst/>
-        </p:spPr>
-        <p:style>
-          <a:lnRef idx="1">
-            <a:schemeClr val="accent1"/>
-          </a:lnRef>
-          <a:fillRef idx="3">
-            <a:schemeClr val="accent1"/>
-          </a:fillRef>
-          <a:effectRef idx="2">
-            <a:schemeClr val="accent1"/>
-          </a:effectRef>
-          <a:fontRef idx="minor">
-            <a:schemeClr val="lt1"/>
-          </a:fontRef>
-        </p:style>
-        <p:txBody>
-          <a:bodyPr rtlCol="0" anchor="ctr"/>
-          <a:lstStyle/>
-          <a:p>
-            <a:pPr algn="ctr"/>
-          </a:p>
-        </p:txBody>
-      </p:sp>
-      <p:sp>
-        <p:nvSpPr>
-          <p:cNvPr id="16" name="TextBox 15"/>
-          <p:cNvSpPr txBox="1"/>
-          <p:nvPr/>
-        </p:nvSpPr>
-        <p:spPr>
-          <a:xfrm>
-            <a:off x="6281928" y="2932938"/>
-            <a:ext cx="5047488" cy="811530"/>
-          </a:xfrm>
-          <a:prstGeom prst="rect">
-            <a:avLst/>
-          </a:prstGeom>
-          <a:noFill/>
-        </p:spPr>
-        <p:txBody>
-          <a:bodyPr wrap="square">
-            <a:spAutoFit/>
-          </a:bodyPr>
-          <a:lstStyle/>
-          <a:p>
-            <a:r>
-              <a:rPr sz="1500" b="0" i="1">
-                <a:solidFill>
-                  <a:srgbClr val="1A1A1A"/>
-                </a:solidFill>
-                <a:latin typeface="Arial"/>
-              </a:rPr>
-              <a:t>"Score the capabilities, list the gaps, rank them."</a:t>
-            </a:r>
-          </a:p>
-        </p:txBody>
-      </p:sp>
-      <p:sp>
-        <p:nvSpPr>
-          <p:cNvPr id="17" name="Rectangle 16"/>
-          <p:cNvSpPr/>
-          <p:nvPr/>
-        </p:nvSpPr>
-        <p:spPr>
-          <a:xfrm>
-            <a:off x="658368" y="3771900"/>
-            <a:ext cx="4937760" cy="12700"/>
-          </a:xfrm>
-          <a:prstGeom prst="rect">
-            <a:avLst/>
-          </a:prstGeom>
-          <a:solidFill>
-            <a:srgbClr val="DDECF4"/>
-          </a:solidFill>
-          <a:ln>
-            <a:noFill/>
-          </a:ln>
-          <a:effectLst/>
-        </p:spPr>
-        <p:style>
-          <a:lnRef idx="1">
-            <a:schemeClr val="accent1"/>
-          </a:lnRef>
-          <a:fillRef idx="3">
-            <a:schemeClr val="accent1"/>
-          </a:fillRef>
-          <a:effectRef idx="2">
-            <a:schemeClr val="accent1"/>
-          </a:effectRef>
-          <a:fontRef idx="minor">
-            <a:schemeClr val="lt1"/>
-          </a:fontRef>
-        </p:style>
-        <p:txBody>
-          <a:bodyPr rtlCol="0" anchor="ctr"/>
-          <a:lstStyle/>
-          <a:p>
-            <a:pPr algn="ctr"/>
-          </a:p>
-        </p:txBody>
-      </p:sp>
-      <p:sp>
-        <p:nvSpPr>
-          <p:cNvPr id="18" name="Oval 17"/>
-          <p:cNvSpPr/>
-          <p:nvPr/>
-        </p:nvSpPr>
-        <p:spPr>
-          <a:xfrm>
-            <a:off x="658368" y="3890772"/>
-            <a:ext cx="310896" cy="310896"/>
-          </a:xfrm>
-          <a:prstGeom prst="ellipse">
-            <a:avLst/>
-          </a:prstGeom>
-          <a:solidFill>
-            <a:srgbClr val="009CD6"/>
-          </a:solidFill>
-          <a:ln>
-            <a:noFill/>
-          </a:ln>
-          <a:effectLst/>
-        </p:spPr>
-        <p:style>
-          <a:lnRef idx="1">
-            <a:schemeClr val="accent1"/>
-          </a:lnRef>
-          <a:fillRef idx="3">
-            <a:schemeClr val="accent1"/>
-          </a:fillRef>
-          <a:effectRef idx="2">
-            <a:schemeClr val="accent1"/>
-          </a:effectRef>
-          <a:fontRef idx="minor">
-            <a:schemeClr val="lt1"/>
-          </a:fontRef>
-        </p:style>
-        <p:txBody>
-          <a:bodyPr rtlCol="0" anchor="ctr" lIns="0" rIns="0" tIns="0" bIns="0" wrap="square"/>
-          <a:lstStyle/>
-          <a:p>
-            <a:pPr algn="ctr"/>
-            <a:r>
-              <a:rPr sz="1300" b="1" i="0">
-                <a:solidFill>
-                  <a:srgbClr val="FFFFFF"/>
-                </a:solidFill>
-                <a:latin typeface="Arial"/>
-              </a:rPr>
-              <a:t>3</a:t>
-            </a:r>
-          </a:p>
-        </p:txBody>
-      </p:sp>
-      <p:sp>
-        <p:nvSpPr>
-          <p:cNvPr id="19" name="TextBox 18"/>
-          <p:cNvSpPr txBox="1"/>
-          <p:nvPr/>
-        </p:nvSpPr>
-        <p:spPr>
-          <a:xfrm>
-            <a:off x="1115568" y="3817620"/>
-            <a:ext cx="4480560" cy="811530"/>
-          </a:xfrm>
-          <a:prstGeom prst="rect">
-            <a:avLst/>
-          </a:prstGeom>
-          <a:noFill/>
-        </p:spPr>
-        <p:txBody>
-          <a:bodyPr wrap="square">
-            <a:spAutoFit/>
-          </a:bodyPr>
-          <a:lstStyle/>
-          <a:p>
-            <a:r>
-              <a:rPr sz="1600" b="1" i="0">
-                <a:solidFill>
-                  <a:srgbClr val="1A1A1A"/>
-                </a:solidFill>
-                <a:latin typeface="Arial"/>
-              </a:rPr>
-              <a:t>State the exact output format you want.</a:t>
-            </a:r>
-          </a:p>
-        </p:txBody>
-      </p:sp>
-      <p:sp>
-        <p:nvSpPr>
-          <p:cNvPr id="20" name="Rectangle 19"/>
-          <p:cNvSpPr/>
-          <p:nvPr/>
-        </p:nvSpPr>
-        <p:spPr>
-          <a:xfrm>
-            <a:off x="6099048" y="3909060"/>
-            <a:ext cx="54864" cy="674370"/>
-          </a:xfrm>
-          <a:prstGeom prst="rect">
-            <a:avLst/>
-          </a:prstGeom>
-          <a:solidFill>
-            <a:srgbClr val="009CD6"/>
-          </a:solidFill>
-          <a:ln>
-            <a:noFill/>
-          </a:ln>
-          <a:effectLst/>
-        </p:spPr>
-        <p:style>
-          <a:lnRef idx="1">
-            <a:schemeClr val="accent1"/>
-          </a:lnRef>
-          <a:fillRef idx="3">
-            <a:schemeClr val="accent1"/>
-          </a:fillRef>
-          <a:effectRef idx="2">
-            <a:schemeClr val="accent1"/>
-          </a:effectRef>
-          <a:fontRef idx="minor">
-            <a:schemeClr val="lt1"/>
-          </a:fontRef>
-        </p:style>
-        <p:txBody>
-          <a:bodyPr rtlCol="0" anchor="ctr"/>
-          <a:lstStyle/>
-          <a:p>
-            <a:pPr algn="ctr"/>
-          </a:p>
-        </p:txBody>
-      </p:sp>
-      <p:sp>
-        <p:nvSpPr>
-          <p:cNvPr id="21" name="Rectangle 20"/>
-          <p:cNvSpPr/>
-          <p:nvPr/>
-        </p:nvSpPr>
-        <p:spPr>
-          <a:xfrm>
-            <a:off x="5669280" y="4037076"/>
-            <a:ext cx="274320" cy="19050"/>
-          </a:xfrm>
-          <a:prstGeom prst="rect">
-            <a:avLst/>
-          </a:prstGeom>
-          <a:solidFill>
-            <a:srgbClr val="009CD6"/>
-          </a:solidFill>
-          <a:ln>
-            <a:noFill/>
-          </a:ln>
-          <a:effectLst/>
-        </p:spPr>
-        <p:style>
-          <a:lnRef idx="1">
-            <a:schemeClr val="accent1"/>
-          </a:lnRef>
-          <a:fillRef idx="3">
-            <a:schemeClr val="accent1"/>
-          </a:fillRef>
-          <a:effectRef idx="2">
-            <a:schemeClr val="accent1"/>
-          </a:effectRef>
-          <a:fontRef idx="minor">
-            <a:schemeClr val="lt1"/>
-          </a:fontRef>
-        </p:style>
-        <p:txBody>
-          <a:bodyPr rtlCol="0" anchor="ctr"/>
-          <a:lstStyle/>
-          <a:p>
-            <a:pPr algn="ctr"/>
-          </a:p>
-        </p:txBody>
-      </p:sp>
-      <p:sp>
-        <p:nvSpPr>
-          <p:cNvPr id="22" name="TextBox 21"/>
-          <p:cNvSpPr txBox="1"/>
-          <p:nvPr/>
-        </p:nvSpPr>
-        <p:spPr>
-          <a:xfrm>
-            <a:off x="6281928" y="3835908"/>
-            <a:ext cx="5047488" cy="811530"/>
-          </a:xfrm>
-          <a:prstGeom prst="rect">
-            <a:avLst/>
-          </a:prstGeom>
-          <a:noFill/>
-        </p:spPr>
-        <p:txBody>
-          <a:bodyPr wrap="square">
-            <a:spAutoFit/>
-          </a:bodyPr>
-          <a:lstStyle/>
-          <a:p>
-            <a:r>
-              <a:rPr sz="1500" b="0" i="1">
-                <a:solidFill>
-                  <a:srgbClr val="1A1A1A"/>
-                </a:solidFill>
-                <a:latin typeface="Arial"/>
-              </a:rPr>
-              <a:t>"A four-row table plus three bullets."</a:t>
-            </a:r>
-          </a:p>
-        </p:txBody>
-      </p:sp>
-      <p:sp>
-        <p:nvSpPr>
-          <p:cNvPr id="23" name="Rectangle 22"/>
-          <p:cNvSpPr/>
-          <p:nvPr/>
-        </p:nvSpPr>
-        <p:spPr>
-          <a:xfrm>
-            <a:off x="658368" y="4674870"/>
-            <a:ext cx="4937760" cy="12700"/>
-          </a:xfrm>
-          <a:prstGeom prst="rect">
-            <a:avLst/>
-          </a:prstGeom>
-          <a:solidFill>
-            <a:srgbClr val="DDECF4"/>
-          </a:solidFill>
-          <a:ln>
-            <a:noFill/>
-          </a:ln>
-          <a:effectLst/>
-        </p:spPr>
-        <p:style>
-          <a:lnRef idx="1">
-            <a:schemeClr val="accent1"/>
-          </a:lnRef>
-          <a:fillRef idx="3">
-            <a:schemeClr val="accent1"/>
-          </a:fillRef>
-          <a:effectRef idx="2">
-            <a:schemeClr val="accent1"/>
-          </a:effectRef>
-          <a:fontRef idx="minor">
-            <a:schemeClr val="lt1"/>
-          </a:fontRef>
-        </p:style>
-        <p:txBody>
-          <a:bodyPr rtlCol="0" anchor="ctr"/>
-          <a:lstStyle/>
-          <a:p>
-            <a:pPr algn="ctr"/>
-          </a:p>
-        </p:txBody>
-      </p:sp>
-      <p:sp>
-        <p:nvSpPr>
-          <p:cNvPr id="24" name="Oval 23"/>
-          <p:cNvSpPr/>
-          <p:nvPr/>
-        </p:nvSpPr>
-        <p:spPr>
-          <a:xfrm>
-            <a:off x="658368" y="4793742"/>
-            <a:ext cx="310896" cy="310896"/>
-          </a:xfrm>
-          <a:prstGeom prst="ellipse">
-            <a:avLst/>
-          </a:prstGeom>
-          <a:solidFill>
-            <a:srgbClr val="009CD6"/>
-          </a:solidFill>
-          <a:ln>
-            <a:noFill/>
-          </a:ln>
-          <a:effectLst/>
-        </p:spPr>
-        <p:style>
-          <a:lnRef idx="1">
-            <a:schemeClr val="accent1"/>
-          </a:lnRef>
-          <a:fillRef idx="3">
-            <a:schemeClr val="accent1"/>
-          </a:fillRef>
-          <a:effectRef idx="2">
-            <a:schemeClr val="accent1"/>
-          </a:effectRef>
-          <a:fontRef idx="minor">
-            <a:schemeClr val="lt1"/>
-          </a:fontRef>
-        </p:style>
-        <p:txBody>
           <a:bodyPr rtlCol="0" anchor="ctr" lIns="0" rIns="0" tIns="0" bIns="0" wrap="square"/>
           <a:lstStyle/>
           <a:p>
@@ -13786,14 +13649,14 @@
       </p:sp>
       <p:sp>
         <p:nvSpPr>
-          <p:cNvPr id="25" name="TextBox 24"/>
+          <p:cNvPr id="14" name="TextBox 13"/>
           <p:cNvSpPr txBox="1"/>
           <p:nvPr/>
         </p:nvSpPr>
         <p:spPr>
           <a:xfrm>
-            <a:off x="1115568" y="4720590"/>
-            <a:ext cx="4480560" cy="811530"/>
+            <a:off x="1115568" y="4686300"/>
+            <a:ext cx="10527487" cy="1028699"/>
           </a:xfrm>
           <a:prstGeom prst="rect">
             <a:avLst/>
@@ -13806,149 +13669,48 @@
           </a:bodyPr>
           <a:lstStyle/>
           <a:p>
-            <a:r>
-              <a:rPr sz="1600" b="1" i="0">
+            <a:pPr>
+              <a:spcAft>
+                <a:spcPts val="300"/>
+              </a:spcAft>
+            </a:pPr>
+            <a:r>
+              <a:rPr sz="1900" b="1" i="0">
                 <a:solidFill>
                   <a:srgbClr val="1A1A1A"/>
                 </a:solidFill>
                 <a:latin typeface="Arial"/>
               </a:rPr>
-              <a:t>Add a safeguard line for this prompt's specific risk.</a:t>
-            </a:r>
-          </a:p>
-        </p:txBody>
-      </p:sp>
-      <p:sp>
-        <p:nvSpPr>
-          <p:cNvPr id="26" name="Rectangle 25"/>
-          <p:cNvSpPr/>
-          <p:nvPr/>
-        </p:nvSpPr>
-        <p:spPr>
-          <a:xfrm>
-            <a:off x="6099048" y="4812030"/>
-            <a:ext cx="54864" cy="674370"/>
-          </a:xfrm>
-          <a:prstGeom prst="rect">
-            <a:avLst/>
-          </a:prstGeom>
-          <a:solidFill>
-            <a:srgbClr val="009CD6"/>
-          </a:solidFill>
-          <a:ln>
-            <a:noFill/>
-          </a:ln>
-          <a:effectLst/>
-        </p:spPr>
-        <p:style>
-          <a:lnRef idx="1">
-            <a:schemeClr val="accent1"/>
-          </a:lnRef>
-          <a:fillRef idx="3">
-            <a:schemeClr val="accent1"/>
-          </a:fillRef>
-          <a:effectRef idx="2">
-            <a:schemeClr val="accent1"/>
-          </a:effectRef>
-          <a:fontRef idx="minor">
-            <a:schemeClr val="lt1"/>
-          </a:fontRef>
-        </p:style>
-        <p:txBody>
-          <a:bodyPr rtlCol="0" anchor="ctr"/>
-          <a:lstStyle/>
-          <a:p>
-            <a:pPr algn="ctr"/>
-          </a:p>
-        </p:txBody>
-      </p:sp>
-      <p:sp>
-        <p:nvSpPr>
-          <p:cNvPr id="27" name="Rectangle 26"/>
-          <p:cNvSpPr/>
-          <p:nvPr/>
-        </p:nvSpPr>
-        <p:spPr>
-          <a:xfrm>
-            <a:off x="5669280" y="4940046"/>
-            <a:ext cx="274320" cy="19050"/>
-          </a:xfrm>
-          <a:prstGeom prst="rect">
-            <a:avLst/>
-          </a:prstGeom>
-          <a:solidFill>
-            <a:srgbClr val="009CD6"/>
-          </a:solidFill>
-          <a:ln>
-            <a:noFill/>
-          </a:ln>
-          <a:effectLst/>
-        </p:spPr>
-        <p:style>
-          <a:lnRef idx="1">
-            <a:schemeClr val="accent1"/>
-          </a:lnRef>
-          <a:fillRef idx="3">
-            <a:schemeClr val="accent1"/>
-          </a:fillRef>
-          <a:effectRef idx="2">
-            <a:schemeClr val="accent1"/>
-          </a:effectRef>
-          <a:fontRef idx="minor">
-            <a:schemeClr val="lt1"/>
-          </a:fontRef>
-        </p:style>
-        <p:txBody>
-          <a:bodyPr rtlCol="0" anchor="ctr"/>
-          <a:lstStyle/>
-          <a:p>
-            <a:pPr algn="ctr"/>
-          </a:p>
-        </p:txBody>
-      </p:sp>
-      <p:sp>
-        <p:nvSpPr>
-          <p:cNvPr id="28" name="TextBox 27"/>
-          <p:cNvSpPr txBox="1"/>
-          <p:nvPr/>
-        </p:nvSpPr>
-        <p:spPr>
-          <a:xfrm>
-            <a:off x="6281928" y="4738878"/>
-            <a:ext cx="5047488" cy="811530"/>
-          </a:xfrm>
-          <a:prstGeom prst="rect">
-            <a:avLst/>
-          </a:prstGeom>
-          <a:noFill/>
-        </p:spPr>
-        <p:txBody>
-          <a:bodyPr wrap="square">
-            <a:spAutoFit/>
-          </a:bodyPr>
-          <a:lstStyle/>
-          <a:p>
-            <a:r>
-              <a:rPr sz="1500" b="0" i="1">
+              <a:t>Years to full maturity, with results visible in months</a:t>
+            </a:r>
+          </a:p>
+          <a:p>
+            <a:pPr>
+              <a:spcAft>
+                <a:spcPts val="300"/>
+              </a:spcAft>
+            </a:pPr>
+            <a:r>
+              <a:rPr sz="1550" b="0" i="0">
                 <a:solidFill>
-                  <a:srgbClr val="1A1A1A"/>
+                  <a:srgbClr val="595959"/>
                 </a:solidFill>
                 <a:latin typeface="Arial"/>
               </a:rPr>
-              <a:t>"Flag any gap involving a politically powerful body."</a:t>
-            </a:r>
-          </a:p>
-        </p:txBody>
-      </p:sp>
-      <p:sp>
-        <p:nvSpPr>
-          <p:cNvPr id="29" name="TextBox 28"/>
+              <a:t>The horizon is long; the first intermediate wins are not.</a:t>
+            </a:r>
+          </a:p>
+        </p:txBody>
+      </p:sp>
+      <p:sp>
+        <p:nvSpPr>
+          <p:cNvPr id="15" name="TextBox 14"/>
           <p:cNvSpPr txBox="1"/>
           <p:nvPr/>
         </p:nvSpPr>
         <p:spPr>
           <a:xfrm>
-            <a:off x="658368" y="5760720"/>
+            <a:off x="658368" y="5870448"/>
             <a:ext cx="10881360" cy="548640"/>
           </a:xfrm>
           <a:prstGeom prst="rect">
@@ -13969,14 +13731,14 @@
                 </a:solidFill>
                 <a:latin typeface="Arial"/>
               </a:rPr>
-              <a:t>Four parts gives you a usable artefact. "Help me with my architecture" gives you mush.</a:t>
-            </a:r>
-          </a:p>
-        </p:txBody>
-      </p:sp>
-      <p:sp>
-        <p:nvSpPr>
-          <p:cNvPr id="30" name="TextBox 29"/>
+              <a:t>Four contexts, one recurring pattern — recurrence is what makes it evidence, not luck.</a:t>
+            </a:r>
+          </a:p>
+        </p:txBody>
+      </p:sp>
+      <p:sp>
+        <p:nvSpPr>
+          <p:cNvPr id="16" name="TextBox 15"/>
           <p:cNvSpPr txBox="1"/>
           <p:nvPr/>
         </p:nvSpPr>
@@ -14003,7 +13765,7 @@
                 </a:solidFill>
                 <a:latin typeface="Arial"/>
               </a:rPr>
-              <a:t>5.1 · Use AI as a drafting partner, not an oracle</a:t>
+              <a:t>5.1 · Is this proven, or just theory? — evidence from real programmes</a:t>
             </a:r>
           </a:p>
         </p:txBody>
@@ -14099,21 +13861,76 @@
                 </a:solidFill>
                 <a:latin typeface="Arial"/>
               </a:rPr>
-              <a:t>A good safeguard names how THIS prompt can mislead you</a:t>
-            </a:r>
-          </a:p>
-        </p:txBody>
-      </p:sp>
-      <p:sp>
-        <p:nvSpPr>
-          <p:cNvPr id="4" name="Rounded Rectangle 3"/>
+              <a:t>The failures are documented too — which is what makes it evidence</a:t>
+            </a:r>
+          </a:p>
+        </p:txBody>
+      </p:sp>
+      <p:sp>
+        <p:nvSpPr>
+          <p:cNvPr id="4" name="TextBox 3"/>
+          <p:cNvSpPr txBox="1"/>
+          <p:nvPr/>
+        </p:nvSpPr>
+        <p:spPr>
+          <a:xfrm>
+            <a:off x="658368" y="1600200"/>
+            <a:ext cx="10881360" cy="2651760"/>
+          </a:xfrm>
+          <a:prstGeom prst="rect">
+            <a:avLst/>
+          </a:prstGeom>
+          <a:noFill/>
+        </p:spPr>
+        <p:txBody>
+          <a:bodyPr wrap="square">
+            <a:spAutoFit/>
+          </a:bodyPr>
+          <a:lstStyle/>
+          <a:p>
+            <a:pPr>
+              <a:spcAft>
+                <a:spcPts val="1200"/>
+              </a:spcAft>
+            </a:pPr>
+            <a:r>
+              <a:rPr sz="2000" b="0" i="0">
+                <a:solidFill>
+                  <a:srgbClr val="1A1A1A"/>
+                </a:solidFill>
+                <a:latin typeface="Arial"/>
+              </a:rPr>
+              <a:t>Kenya's identity programme met real obstacles — in the courts, in parliament, in implementation — and the debate is public and documented.</a:t>
+            </a:r>
+          </a:p>
+          <a:p>
+            <a:pPr>
+              <a:spcAft>
+                <a:spcPts val="1200"/>
+              </a:spcAft>
+            </a:pPr>
+            <a:r>
+              <a:rPr sz="2000" b="0" i="0">
+                <a:solidFill>
+                  <a:srgbClr val="1A1A1A"/>
+                </a:solidFill>
+                <a:latin typeface="Arial"/>
+              </a:rPr>
+              <a:t>That is not a reason to dismiss the approach; it is part of the evidence. The programmes that struggled struggled for consistent, learnable reasons.</a:t>
+            </a:r>
+          </a:p>
+        </p:txBody>
+      </p:sp>
+      <p:sp>
+        <p:nvSpPr>
+          <p:cNvPr id="5" name="Rounded Rectangle 4"/>
           <p:cNvSpPr/>
           <p:nvPr/>
         </p:nvSpPr>
         <p:spPr>
           <a:xfrm>
-            <a:off x="658368" y="1554480"/>
-            <a:ext cx="5394960" cy="3977639"/>
+            <a:off x="658368" y="4434840"/>
+            <a:ext cx="10881360" cy="1325880"/>
           </a:xfrm>
           <a:prstGeom prst="roundRect">
             <a:avLst>
@@ -14152,14 +13969,14 @@
       </p:sp>
       <p:sp>
         <p:nvSpPr>
-          <p:cNvPr id="5" name="TextBox 4"/>
+          <p:cNvPr id="6" name="TextBox 5"/>
           <p:cNvSpPr txBox="1"/>
           <p:nvPr/>
         </p:nvSpPr>
         <p:spPr>
           <a:xfrm>
-            <a:off x="859536" y="1700784"/>
-            <a:ext cx="4992624" cy="3703320"/>
+            <a:off x="859536" y="4626864"/>
+            <a:ext cx="10479024" cy="1051560"/>
           </a:xfrm>
           <a:prstGeom prst="rect">
             <a:avLst/>
@@ -14178,235 +13995,20 @@
               </a:spcAft>
             </a:pPr>
             <a:r>
-              <a:rPr sz="1900" b="1" i="0">
+              <a:rPr sz="2300" b="1" i="0">
                 <a:solidFill>
                   <a:srgbClr val="006E96"/>
                 </a:solidFill>
                 <a:latin typeface="Arial"/>
               </a:rPr>
-              <a:t>FOR A GAP ANALYSIS</a:t>
-            </a:r>
-          </a:p>
-          <a:p>
-            <a:pPr>
-              <a:spcAft>
-                <a:spcPts val="700"/>
-              </a:spcAft>
-            </a:pPr>
-            <a:r>
-              <a:rPr sz="1600" b="0" i="0">
-                <a:solidFill>
-                  <a:srgbClr val="1A1A1A"/>
-                </a:solidFill>
-                <a:latin typeface="Arial"/>
-              </a:rPr>
-              <a:t>A severity judgement about a powerful ministry must be checked with the decision-maker.</a:t>
-            </a:r>
-          </a:p>
-          <a:p>
-            <a:pPr>
-              <a:spcAft>
-                <a:spcPts val="700"/>
-              </a:spcAft>
-            </a:pPr>
-            <a:r>
-              <a:rPr sz="1600" b="0" i="0">
-                <a:solidFill>
-                  <a:srgbClr val="1A1A1A"/>
-                </a:solidFill>
-                <a:latin typeface="Arial"/>
-              </a:rPr>
-              <a:t>Not softened by the model.</a:t>
-            </a:r>
-          </a:p>
-          <a:p>
-            <a:pPr>
-              <a:spcAft>
-                <a:spcPts val="700"/>
-              </a:spcAft>
-            </a:pPr>
-            <a:r>
-              <a:rPr sz="1600" b="0" i="0">
-                <a:solidFill>
-                  <a:srgbClr val="1A1A1A"/>
-                </a:solidFill>
-                <a:latin typeface="Arial"/>
-              </a:rPr>
-              <a:t>The trap here is a model being diplomatic about power.</a:t>
-            </a:r>
-          </a:p>
-        </p:txBody>
-      </p:sp>
-      <p:sp>
-        <p:nvSpPr>
-          <p:cNvPr id="6" name="Rounded Rectangle 5"/>
-          <p:cNvSpPr/>
-          <p:nvPr/>
-        </p:nvSpPr>
-        <p:spPr>
-          <a:xfrm>
-            <a:off x="6263640" y="1554480"/>
-            <a:ext cx="5394960" cy="3977639"/>
-          </a:xfrm>
-          <a:prstGeom prst="roundRect">
-            <a:avLst>
-              <a:gd name="adj" fmla="val 4500"/>
-            </a:avLst>
-          </a:prstGeom>
-          <a:solidFill>
-            <a:srgbClr val="F2F2F2"/>
-          </a:solidFill>
-          <a:ln>
-            <a:noFill/>
-          </a:ln>
-          <a:effectLst/>
-        </p:spPr>
-        <p:style>
-          <a:lnRef idx="1">
-            <a:schemeClr val="accent1"/>
-          </a:lnRef>
-          <a:fillRef idx="3">
-            <a:schemeClr val="accent1"/>
-          </a:fillRef>
-          <a:effectRef idx="2">
-            <a:schemeClr val="accent1"/>
-          </a:effectRef>
-          <a:fontRef idx="minor">
-            <a:schemeClr val="lt1"/>
-          </a:fontRef>
-        </p:style>
-        <p:txBody>
-          <a:bodyPr rtlCol="0" anchor="ctr"/>
-          <a:lstStyle/>
-          <a:p>
-            <a:pPr algn="ctr"/>
+              <a:t>Not a brochure of successes. A record of what works and what does not.</a:t>
+            </a:r>
           </a:p>
         </p:txBody>
       </p:sp>
       <p:sp>
         <p:nvSpPr>
           <p:cNvPr id="7" name="TextBox 6"/>
-          <p:cNvSpPr txBox="1"/>
-          <p:nvPr/>
-        </p:nvSpPr>
-        <p:spPr>
-          <a:xfrm>
-            <a:off x="6464808" y="1700784"/>
-            <a:ext cx="4992624" cy="3703320"/>
-          </a:xfrm>
-          <a:prstGeom prst="rect">
-            <a:avLst/>
-          </a:prstGeom>
-          <a:noFill/>
-        </p:spPr>
-        <p:txBody>
-          <a:bodyPr wrap="square">
-            <a:spAutoFit/>
-          </a:bodyPr>
-          <a:lstStyle/>
-          <a:p>
-            <a:pPr>
-              <a:spcAft>
-                <a:spcPts val="700"/>
-              </a:spcAft>
-            </a:pPr>
-            <a:r>
-              <a:rPr sz="1900" b="1" i="0">
-                <a:solidFill>
-                  <a:srgbClr val="006E96"/>
-                </a:solidFill>
-                <a:latin typeface="Arial"/>
-              </a:rPr>
-              <a:t>FOR A COMPARATOR CARD</a:t>
-            </a:r>
-          </a:p>
-          <a:p>
-            <a:pPr>
-              <a:spcAft>
-                <a:spcPts val="700"/>
-              </a:spcAft>
-            </a:pPr>
-            <a:r>
-              <a:rPr sz="1600" b="0" i="0">
-                <a:solidFill>
-                  <a:srgbClr val="1A1A1A"/>
-                </a:solidFill>
-                <a:latin typeface="Arial"/>
-              </a:rPr>
-              <a:t>Discard any country example where the cited source does not actually say what the prompt claims.</a:t>
-            </a:r>
-          </a:p>
-          <a:p>
-            <a:pPr>
-              <a:spcAft>
-                <a:spcPts val="700"/>
-              </a:spcAft>
-            </a:pPr>
-            <a:r>
-              <a:rPr sz="1600" b="0" i="0">
-                <a:solidFill>
-                  <a:srgbClr val="1A1A1A"/>
-                </a:solidFill>
-                <a:latin typeface="Arial"/>
-              </a:rPr>
-              <a:t>Discard the claim, not just the citation.</a:t>
-            </a:r>
-          </a:p>
-          <a:p>
-            <a:pPr>
-              <a:spcAft>
-                <a:spcPts val="700"/>
-              </a:spcAft>
-            </a:pPr>
-            <a:r>
-              <a:rPr sz="1600" b="0" i="0">
-                <a:solidFill>
-                  <a:srgbClr val="1A1A1A"/>
-                </a:solidFill>
-                <a:latin typeface="Arial"/>
-              </a:rPr>
-              <a:t>The trap here is a fluent, invented source.</a:t>
-            </a:r>
-          </a:p>
-        </p:txBody>
-      </p:sp>
-      <p:sp>
-        <p:nvSpPr>
-          <p:cNvPr id="8" name="TextBox 7"/>
-          <p:cNvSpPr txBox="1"/>
-          <p:nvPr/>
-        </p:nvSpPr>
-        <p:spPr>
-          <a:xfrm>
-            <a:off x="658368" y="5715000"/>
-            <a:ext cx="10881360" cy="548640"/>
-          </a:xfrm>
-          <a:prstGeom prst="rect">
-            <a:avLst/>
-          </a:prstGeom>
-          <a:noFill/>
-        </p:spPr>
-        <p:txBody>
-          <a:bodyPr wrap="square">
-            <a:spAutoFit/>
-          </a:bodyPr>
-          <a:lstStyle/>
-          <a:p>
-            <a:r>
-              <a:rPr sz="1550" b="1" i="0">
-                <a:solidFill>
-                  <a:srgbClr val="006E96"/>
-                </a:solidFill>
-                <a:latin typeface="Arial"/>
-              </a:rPr>
-              <a:t>Not "AI can make mistakes" — that helps no one.</a:t>
-            </a:r>
-          </a:p>
-        </p:txBody>
-      </p:sp>
-      <p:sp>
-        <p:nvSpPr>
-          <p:cNvPr id="9" name="TextBox 8"/>
           <p:cNvSpPr txBox="1"/>
           <p:nvPr/>
         </p:nvSpPr>
@@ -14433,7 +14035,7 @@
                 </a:solidFill>
                 <a:latin typeface="Arial"/>
               </a:rPr>
-              <a:t>5.1 · Use AI as a drafting partner, not an oracle</a:t>
+              <a:t>5.1 · Is this proven, or just theory? — evidence from real programmes</a:t>
             </a:r>
           </a:p>
         </p:txBody>
@@ -14529,7 +14131,7 @@
                 </a:solidFill>
                 <a:latin typeface="Arial"/>
               </a:rPr>
-              <a:t>You decide; the AI drafts</a:t>
+              <a:t>You are not the first — the path is already charted</a:t>
             </a:r>
           </a:p>
         </p:txBody>
@@ -14543,7 +14145,7 @@
         <p:spPr>
           <a:xfrm>
             <a:off x="658368" y="1600200"/>
-            <a:ext cx="10881360" cy="1984248"/>
+            <a:ext cx="10881360" cy="2651760"/>
           </a:xfrm>
           <a:prstGeom prst="rect">
             <a:avLst/>
@@ -14568,7 +14170,7 @@
                 </a:solidFill>
                 <a:latin typeface="Arial"/>
               </a:rPr>
-              <a:t>The AI prepares the Board paper; the Board rules. It ranks the gaps; you defend the ranking. It proposes a sourcing call; the architect and the EA Board own the decision.</a:t>
+              <a:t>The common elements are known, and so are the common ways programmes fail. You are not being asked to invent an approach and hope it works.</a:t>
             </a:r>
           </a:p>
           <a:p>
@@ -14584,7 +14186,7 @@
                 </a:solidFill>
                 <a:latin typeface="Arial"/>
               </a:rPr>
-              <a:t>The moment the output becomes the decision instead of the input to one, you have handed your judgement to a tool with no accountability, that cannot be questioned in a meeting.</a:t>
+              <a:t>You are being asked to adapt a pattern four very different governments have already shown delivers — to your country, your constraints, your sector.</a:t>
             </a:r>
           </a:p>
         </p:txBody>
@@ -14597,7 +14199,7 @@
         </p:nvSpPr>
         <p:spPr>
           <a:xfrm>
-            <a:off x="658368" y="3767328"/>
+            <a:off x="658368" y="4434840"/>
             <a:ext cx="10881360" cy="1325880"/>
           </a:xfrm>
           <a:prstGeom prst="roundRect">
@@ -14643,7 +14245,7 @@
         </p:nvSpPr>
         <p:spPr>
           <a:xfrm>
-            <a:off x="859536" y="3959352"/>
+            <a:off x="859536" y="4626864"/>
             <a:ext cx="10479024" cy="1051560"/>
           </a:xfrm>
           <a:prstGeom prst="rect">
@@ -14669,7 +14271,7 @@
                 </a:solidFill>
                 <a:latin typeface="Arial"/>
               </a:rPr>
-              <a:t>Use it to think faster, never to think less.</a:t>
+              <a:t>A far easier case to make than "trust me, this should work".</a:t>
             </a:r>
           </a:p>
         </p:txBody>
@@ -14703,7 +14305,7 @@
                 </a:solidFill>
                 <a:latin typeface="Arial"/>
               </a:rPr>
-              <a:t>5.1 · Use AI as a drafting partner, not an oracle</a:t>
+              <a:t>5.1 · Is this proven, or just theory? — evidence from real programmes</a:t>
             </a:r>
           </a:p>
         </p:txBody>
@@ -14755,7 +14357,7 @@
                 </a:solidFill>
                 <a:latin typeface="Arial"/>
               </a:rPr>
-              <a:t>AI is a fast drafting partner for EA work, not an oracle — use the four-part prompt, write a specific safeguard, and remember: you decide, the AI drafts.</a:t>
+              <a:t>Across four very different governments the same architectural pattern has already produced results — so your question is not whether it works, but how to apply it where you are.</a:t>
             </a:r>
           </a:p>
         </p:txBody>
@@ -14823,7 +14425,7 @@
                 </a:solidFill>
                 <a:latin typeface="Arial"/>
               </a:rPr>
-              <a:t>5.1 · Use AI as a drafting partner, not an oracle</a:t>
+              <a:t>5.1 · Is this proven, or just theory? — evidence from real programmes</a:t>
             </a:r>
           </a:p>
         </p:txBody>
@@ -14993,7 +14595,7 @@
                 </a:solidFill>
                 <a:latin typeface="Arial"/>
               </a:rPr>
-              <a:t>•  ITU Knowledge Products contract Terms of Reference — §4.3 (AI integration)</a:t>
+              <a:t>•  Rwanda — Irembo (irembo.gov.rw)</a:t>
             </a:r>
           </a:p>
           <a:p>
@@ -15009,7 +14611,55 @@
                 </a:solidFill>
                 <a:latin typeface="Arial"/>
               </a:rPr>
-              <a:t>•  GovStack knowledge base — govstack.global</a:t>
+              <a:t>•  Kenya — Huduma Kenya (huduma.go.ke)</a:t>
+            </a:r>
+          </a:p>
+          <a:p>
+            <a:pPr>
+              <a:spcAft>
+                <a:spcPts val="1200"/>
+              </a:spcAft>
+            </a:pPr>
+            <a:r>
+              <a:rPr sz="1700" b="0" i="0">
+                <a:solidFill>
+                  <a:srgbClr val="1A1A1A"/>
+                </a:solidFill>
+                <a:latin typeface="Arial"/>
+              </a:rPr>
+              <a:t>•  South Africa — SITA (sita.co.za)</a:t>
+            </a:r>
+          </a:p>
+          <a:p>
+            <a:pPr>
+              <a:spcAft>
+                <a:spcPts val="1200"/>
+              </a:spcAft>
+            </a:pPr>
+            <a:r>
+              <a:rPr sz="1700" b="0" i="0">
+                <a:solidFill>
+                  <a:srgbClr val="1A1A1A"/>
+                </a:solidFill>
+                <a:latin typeface="Arial"/>
+              </a:rPr>
+              <a:t>•  Estonia — e-Estonia.com and RIA (ria.ee)</a:t>
+            </a:r>
+          </a:p>
+          <a:p>
+            <a:pPr>
+              <a:spcAft>
+                <a:spcPts val="1200"/>
+              </a:spcAft>
+            </a:pPr>
+            <a:r>
+              <a:rPr sz="1700" b="0" i="0">
+                <a:solidFill>
+                  <a:srgbClr val="1A1A1A"/>
+                </a:solidFill>
+                <a:latin typeface="Arial"/>
+              </a:rPr>
+              <a:t>•  PAERA v1.0 — §5.7 (Recommended Roadmap); §2.1 (Problem statement)</a:t>
             </a:r>
           </a:p>
         </p:txBody>
@@ -15077,7 +14727,7 @@
                 </a:solidFill>
                 <a:latin typeface="Arial"/>
               </a:rPr>
-              <a:t>5.1 · Use AI as a drafting partner, not an oracle</a:t>
+              <a:t>5.1 · Is this proven, or just theory? — evidence from real programmes</a:t>
             </a:r>
           </a:p>
         </p:txBody>
